--- a/Customer_Retention_Predictor_Presentation.pptx
+++ b/Customer_Retention_Predictor_Presentation.pptx
@@ -5,7 +5,7 @@
     <p:sldMasterId id="2147483648" r:id="rId1"/>
   </p:sldMasterIdLst>
   <p:notesMasterIdLst>
-    <p:notesMasterId r:id="rId13"/>
+    <p:notesMasterId r:id="rId14"/>
   </p:notesMasterIdLst>
   <p:sldIdLst>
     <p:sldId id="256" r:id="rId2"/>
@@ -16,9 +16,10 @@
     <p:sldId id="261" r:id="rId7"/>
     <p:sldId id="262" r:id="rId8"/>
     <p:sldId id="263" r:id="rId9"/>
-    <p:sldId id="264" r:id="rId10"/>
-    <p:sldId id="265" r:id="rId11"/>
-    <p:sldId id="266" r:id="rId12"/>
+    <p:sldId id="267" r:id="rId10"/>
+    <p:sldId id="264" r:id="rId11"/>
+    <p:sldId id="265" r:id="rId12"/>
+    <p:sldId id="266" r:id="rId13"/>
   </p:sldIdLst>
   <p:sldSz cx="12192000" cy="6858000"/>
   <p:notesSz cx="6858000" cy="9144000"/>
@@ -117,6 +118,11 @@
       </a:defRPr>
     </a:lvl9pPr>
   </p:defaultTextStyle>
+  <p:extLst>
+    <p:ext uri="{EFAFB233-063F-42B5-8137-9DF3F51BA10A}">
+      <p15:sldGuideLst xmlns:p15="http://schemas.microsoft.com/office/powerpoint/2012/main"/>
+    </p:ext>
+  </p:extLst>
 </p:presentation>
 </file>
 
@@ -163,6 +169,11 @@
                 </a:outerShdw>
               </a:effectLst>
             </c:spPr>
+            <c:extLst>
+              <c:ext xmlns:c16="http://schemas.microsoft.com/office/drawing/2014/chart" uri="{C3380CC4-5D6E-409C-BE32-E72D297353CC}">
+                <c16:uniqueId val="{00000001-B702-0F43-8050-405FEB43AAC5}"/>
+              </c:ext>
+            </c:extLst>
           </c:dPt>
           <c:dPt>
             <c:idx val="1"/>
@@ -182,6 +193,11 @@
                 </a:outerShdw>
               </a:effectLst>
             </c:spPr>
+            <c:extLst>
+              <c:ext xmlns:c16="http://schemas.microsoft.com/office/drawing/2014/chart" uri="{C3380CC4-5D6E-409C-BE32-E72D297353CC}">
+                <c16:uniqueId val="{00000003-B702-0F43-8050-405FEB43AAC5}"/>
+              </c:ext>
+            </c:extLst>
           </c:dPt>
           <c:dLbls>
             <c:spPr>
@@ -548,451 +564,6 @@
         <a:noFill/>
       </c:spPr>
     </c:plotArea>
-    <c:plotVisOnly val="1"/>
-    <c:dispBlanksAs val="zero"/>
-    <c:showDLblsOverMax val="1"/>
-  </c:chart>
-  <c:spPr>
-    <a:solidFill>
-      <a:srgbClr val="FFFFFF"/>
-    </a:solidFill>
-  </c:spPr>
-</c:chartSpace>
-</file>
-
-<file path=ppt/charts/chart3.xml><?xml version="1.0" encoding="utf-8"?>
-<c:chartSpace xmlns:c="http://schemas.openxmlformats.org/drawingml/2006/chart" xmlns:a="http://schemas.openxmlformats.org/drawingml/2006/main" xmlns:r="http://schemas.openxmlformats.org/officeDocument/2006/relationships" xmlns:c16r2="http://schemas.microsoft.com/office/drawing/2015/06/chart">
-  <c:date1904 val="1"/>
-  <c:lang val="en-US"/>
-  <c:roundedCorners val="1"/>
-  <c:style val="2"/>
-  <c:chart>
-    <c:autoTitleDeleted val="1"/>
-    <c:plotArea>
-      <c:layout/>
-      <c:barChart>
-        <c:barDir val="col"/>
-        <c:grouping val="clustered"/>
-        <c:varyColors val="0"/>
-        <c:ser>
-          <c:idx val="0"/>
-          <c:order val="0"/>
-          <c:tx>
-            <c:v>Accuracy</c:v>
-          </c:tx>
-          <c:spPr>
-            <a:solidFill>
-              <a:srgbClr val="3D8DFF"/>
-            </a:solidFill>
-          </c:spPr>
-          <c:invertIfNegative val="1"/>
-          <c:dLbls>
-            <c:spPr>
-              <a:noFill/>
-              <a:ln>
-                <a:noFill/>
-              </a:ln>
-              <a:effectLst/>
-            </c:spPr>
-            <c:txPr>
-              <a:bodyPr anchorCtr="1"/>
-              <a:lstStyle/>
-              <a:p>
-                <a:pPr>
-                  <a:defRPr sz="750">
-                    <a:solidFill>
-                      <a:srgbClr val="000000"/>
-                    </a:solidFill>
-                  </a:defRPr>
-                </a:pPr>
-                <a:endParaRPr lang="en-US"/>
-              </a:p>
-            </c:txPr>
-            <c:dLblPos val="outEnd"/>
-            <c:showLegendKey val="0"/>
-            <c:showVal val="1"/>
-            <c:showCatName val="0"/>
-            <c:showSerName val="0"/>
-            <c:showPercent val="0"/>
-            <c:showBubbleSize val="0"/>
-            <c:showLeaderLines val="0"/>
-            <c:extLst>
-              <c:ext xmlns:c15="http://schemas.microsoft.com/office/drawing/2012/chart" uri="{CE6537A1-D6FC-4f65-9D91-7224C49458BB}">
-                <c15:showLeaderLines val="0"/>
-              </c:ext>
-            </c:extLst>
-          </c:dLbls>
-          <c:cat>
-            <c:strLit>
-              <c:ptCount val="4"/>
-              <c:pt idx="0">
-                <c:v>LogReg</c:v>
-              </c:pt>
-              <c:pt idx="1">
-                <c:v>SVM</c:v>
-              </c:pt>
-              <c:pt idx="2">
-                <c:v>Tree</c:v>
-              </c:pt>
-              <c:pt idx="3">
-                <c:v>Forest</c:v>
-              </c:pt>
-            </c:strLit>
-          </c:cat>
-          <c:val>
-            <c:numLit>
-              <c:formatCode>0"%"</c:formatCode>
-              <c:ptCount val="4"/>
-              <c:pt idx="0">
-                <c:v>79.599999999999994</c:v>
-              </c:pt>
-              <c:pt idx="1">
-                <c:v>79</c:v>
-              </c:pt>
-              <c:pt idx="2">
-                <c:v>85.2</c:v>
-              </c:pt>
-              <c:pt idx="3">
-                <c:v>86.9</c:v>
-              </c:pt>
-            </c:numLit>
-          </c:val>
-          <c:extLst>
-            <c:ext xmlns:c14="http://schemas.microsoft.com/office/drawing/2007/8/2/chart" uri="{6F2FDCE9-48DA-4B69-8628-5D25D57E5C99}">
-              <c14:invertSolidFillFmt>
-                <c14:spPr xmlns:c14="http://schemas.microsoft.com/office/drawing/2007/8/2/chart">
-                  <a:solidFill>
-                    <a:srgbClr val="FFFFFF"/>
-                  </a:solidFill>
-                </c14:spPr>
-              </c14:invertSolidFillFmt>
-            </c:ext>
-            <c:ext xmlns:c16="http://schemas.microsoft.com/office/drawing/2014/chart" uri="{C3380CC4-5D6E-409C-BE32-E72D297353CC}">
-              <c16:uniqueId val="{00000000-AFDC-4D72-BEB9-AAA427D1E4B6}"/>
-            </c:ext>
-          </c:extLst>
-        </c:ser>
-        <c:ser>
-          <c:idx val="1"/>
-          <c:order val="1"/>
-          <c:tx>
-            <c:v>Recall</c:v>
-          </c:tx>
-          <c:spPr>
-            <a:solidFill>
-              <a:srgbClr val="6DCBF4"/>
-            </a:solidFill>
-          </c:spPr>
-          <c:invertIfNegative val="1"/>
-          <c:dLbls>
-            <c:spPr>
-              <a:noFill/>
-              <a:ln>
-                <a:noFill/>
-              </a:ln>
-              <a:effectLst/>
-            </c:spPr>
-            <c:txPr>
-              <a:bodyPr anchorCtr="1"/>
-              <a:lstStyle/>
-              <a:p>
-                <a:pPr>
-                  <a:defRPr sz="750">
-                    <a:solidFill>
-                      <a:srgbClr val="000000"/>
-                    </a:solidFill>
-                  </a:defRPr>
-                </a:pPr>
-                <a:endParaRPr lang="en-US"/>
-              </a:p>
-            </c:txPr>
-            <c:dLblPos val="outEnd"/>
-            <c:showLegendKey val="0"/>
-            <c:showVal val="1"/>
-            <c:showCatName val="0"/>
-            <c:showSerName val="0"/>
-            <c:showPercent val="0"/>
-            <c:showBubbleSize val="0"/>
-            <c:showLeaderLines val="0"/>
-            <c:extLst>
-              <c:ext xmlns:c15="http://schemas.microsoft.com/office/drawing/2012/chart" uri="{CE6537A1-D6FC-4f65-9D91-7224C49458BB}">
-                <c15:showLeaderLines val="0"/>
-              </c:ext>
-            </c:extLst>
-          </c:dLbls>
-          <c:cat>
-            <c:strLit>
-              <c:ptCount val="4"/>
-              <c:pt idx="0">
-                <c:v>LogReg</c:v>
-              </c:pt>
-              <c:pt idx="1">
-                <c:v>SVM</c:v>
-              </c:pt>
-              <c:pt idx="2">
-                <c:v>Tree</c:v>
-              </c:pt>
-              <c:pt idx="3">
-                <c:v>Forest</c:v>
-              </c:pt>
-            </c:strLit>
-          </c:cat>
-          <c:val>
-            <c:numLit>
-              <c:formatCode>0"%"</c:formatCode>
-              <c:ptCount val="4"/>
-              <c:pt idx="0">
-                <c:v>79.099999999999994</c:v>
-              </c:pt>
-              <c:pt idx="1">
-                <c:v>77.5</c:v>
-              </c:pt>
-              <c:pt idx="2">
-                <c:v>38.200000000000003</c:v>
-              </c:pt>
-              <c:pt idx="3">
-                <c:v>45.8</c:v>
-              </c:pt>
-            </c:numLit>
-          </c:val>
-          <c:extLst>
-            <c:ext xmlns:c14="http://schemas.microsoft.com/office/drawing/2007/8/2/chart" uri="{6F2FDCE9-48DA-4B69-8628-5D25D57E5C99}">
-              <c14:invertSolidFillFmt>
-                <c14:spPr xmlns:c14="http://schemas.microsoft.com/office/drawing/2007/8/2/chart">
-                  <a:solidFill>
-                    <a:srgbClr val="FFFFFF"/>
-                  </a:solidFill>
-                </c14:spPr>
-              </c14:invertSolidFillFmt>
-            </c:ext>
-            <c:ext xmlns:c16="http://schemas.microsoft.com/office/drawing/2014/chart" uri="{C3380CC4-5D6E-409C-BE32-E72D297353CC}">
-              <c16:uniqueId val="{00000001-AFDC-4D72-BEB9-AAA427D1E4B6}"/>
-            </c:ext>
-          </c:extLst>
-        </c:ser>
-        <c:ser>
-          <c:idx val="2"/>
-          <c:order val="2"/>
-          <c:tx>
-            <c:v>F1</c:v>
-          </c:tx>
-          <c:spPr>
-            <a:solidFill>
-              <a:srgbClr val="C9EAF8"/>
-            </a:solidFill>
-          </c:spPr>
-          <c:invertIfNegative val="1"/>
-          <c:dLbls>
-            <c:spPr>
-              <a:noFill/>
-              <a:ln>
-                <a:noFill/>
-              </a:ln>
-              <a:effectLst/>
-            </c:spPr>
-            <c:txPr>
-              <a:bodyPr anchorCtr="1"/>
-              <a:lstStyle/>
-              <a:p>
-                <a:pPr>
-                  <a:defRPr sz="750">
-                    <a:solidFill>
-                      <a:srgbClr val="000000"/>
-                    </a:solidFill>
-                  </a:defRPr>
-                </a:pPr>
-                <a:endParaRPr lang="en-US"/>
-              </a:p>
-            </c:txPr>
-            <c:dLblPos val="outEnd"/>
-            <c:showLegendKey val="0"/>
-            <c:showVal val="1"/>
-            <c:showCatName val="0"/>
-            <c:showSerName val="0"/>
-            <c:showPercent val="0"/>
-            <c:showBubbleSize val="0"/>
-            <c:showLeaderLines val="0"/>
-            <c:extLst>
-              <c:ext xmlns:c15="http://schemas.microsoft.com/office/drawing/2012/chart" uri="{CE6537A1-D6FC-4f65-9D91-7224C49458BB}">
-                <c15:showLeaderLines val="0"/>
-              </c:ext>
-            </c:extLst>
-          </c:dLbls>
-          <c:cat>
-            <c:strLit>
-              <c:ptCount val="4"/>
-              <c:pt idx="0">
-                <c:v>LogReg</c:v>
-              </c:pt>
-              <c:pt idx="1">
-                <c:v>SVM</c:v>
-              </c:pt>
-              <c:pt idx="2">
-                <c:v>Tree</c:v>
-              </c:pt>
-              <c:pt idx="3">
-                <c:v>Forest</c:v>
-              </c:pt>
-            </c:strLit>
-          </c:cat>
-          <c:val>
-            <c:numLit>
-              <c:formatCode>0"%"</c:formatCode>
-              <c:ptCount val="4"/>
-              <c:pt idx="0">
-                <c:v>61.3</c:v>
-              </c:pt>
-              <c:pt idx="1">
-                <c:v>60.1</c:v>
-              </c:pt>
-              <c:pt idx="2">
-                <c:v>51.3</c:v>
-              </c:pt>
-              <c:pt idx="3">
-                <c:v>58.7</c:v>
-              </c:pt>
-            </c:numLit>
-          </c:val>
-          <c:extLst>
-            <c:ext xmlns:c14="http://schemas.microsoft.com/office/drawing/2007/8/2/chart" uri="{6F2FDCE9-48DA-4B69-8628-5D25D57E5C99}">
-              <c14:invertSolidFillFmt>
-                <c14:spPr xmlns:c14="http://schemas.microsoft.com/office/drawing/2007/8/2/chart">
-                  <a:solidFill>
-                    <a:srgbClr val="FFFFFF"/>
-                  </a:solidFill>
-                </c14:spPr>
-              </c14:invertSolidFillFmt>
-            </c:ext>
-            <c:ext xmlns:c16="http://schemas.microsoft.com/office/drawing/2014/chart" uri="{C3380CC4-5D6E-409C-BE32-E72D297353CC}">
-              <c16:uniqueId val="{00000002-AFDC-4D72-BEB9-AAA427D1E4B6}"/>
-            </c:ext>
-          </c:extLst>
-        </c:ser>
-        <c:dLbls>
-          <c:dLblPos val="outEnd"/>
-          <c:showLegendKey val="0"/>
-          <c:showVal val="1"/>
-          <c:showCatName val="0"/>
-          <c:showSerName val="0"/>
-          <c:showPercent val="0"/>
-          <c:showBubbleSize val="0"/>
-        </c:dLbls>
-        <c:gapWidth val="85"/>
-        <c:axId val="48650112"/>
-        <c:axId val="48672768"/>
-      </c:barChart>
-      <c:catAx>
-        <c:axId val="48650112"/>
-        <c:scaling>
-          <c:orientation val="minMax"/>
-        </c:scaling>
-        <c:delete val="0"/>
-        <c:axPos val="b"/>
-        <c:numFmt formatCode="General" sourceLinked="1"/>
-        <c:majorTickMark val="none"/>
-        <c:minorTickMark val="none"/>
-        <c:tickLblPos val="nextTo"/>
-        <c:spPr>
-          <a:ln w="9525">
-            <a:solidFill>
-              <a:srgbClr val="B8BCC4"/>
-            </a:solidFill>
-            <a:prstDash val="solid"/>
-          </a:ln>
-        </c:spPr>
-        <c:txPr>
-          <a:bodyPr anchorCtr="1"/>
-          <a:lstStyle/>
-          <a:p>
-            <a:pPr>
-              <a:defRPr sz="975">
-                <a:solidFill>
-                  <a:srgbClr val="000000"/>
-                </a:solidFill>
-              </a:defRPr>
-            </a:pPr>
-            <a:endParaRPr lang="en-US"/>
-          </a:p>
-        </c:txPr>
-        <c:crossAx val="48672768"/>
-        <c:crosses val="autoZero"/>
-        <c:auto val="1"/>
-        <c:lblAlgn val="ctr"/>
-        <c:lblOffset val="100"/>
-        <c:noMultiLvlLbl val="0"/>
-      </c:catAx>
-      <c:valAx>
-        <c:axId val="48672768"/>
-        <c:scaling>
-          <c:orientation val="minMax"/>
-          <c:max val="100"/>
-          <c:min val="0"/>
-        </c:scaling>
-        <c:delete val="0"/>
-        <c:axPos val="l"/>
-        <c:majorGridlines>
-          <c:spPr>
-            <a:ln w="9525">
-              <a:solidFill>
-                <a:srgbClr val="F2F2F2"/>
-              </a:solidFill>
-              <a:prstDash val="solid"/>
-            </a:ln>
-          </c:spPr>
-        </c:majorGridlines>
-        <c:numFmt formatCode="0&quot;%&quot;" sourceLinked="1"/>
-        <c:majorTickMark val="none"/>
-        <c:minorTickMark val="none"/>
-        <c:tickLblPos val="nextTo"/>
-        <c:spPr>
-          <a:ln w="9525">
-            <a:solidFill>
-              <a:srgbClr val="D4D4D4"/>
-            </a:solidFill>
-            <a:prstDash val="solid"/>
-          </a:ln>
-        </c:spPr>
-        <c:txPr>
-          <a:bodyPr anchorCtr="1"/>
-          <a:lstStyle/>
-          <a:p>
-            <a:pPr>
-              <a:defRPr sz="900">
-                <a:solidFill>
-                  <a:srgbClr val="4B5563"/>
-                </a:solidFill>
-              </a:defRPr>
-            </a:pPr>
-            <a:endParaRPr lang="en-US"/>
-          </a:p>
-        </c:txPr>
-        <c:crossAx val="48650112"/>
-        <c:crosses val="autoZero"/>
-        <c:crossBetween val="between"/>
-        <c:majorUnit val="20"/>
-      </c:valAx>
-      <c:spPr>
-        <a:noFill/>
-      </c:spPr>
-    </c:plotArea>
-    <c:legend>
-      <c:legendPos val="b"/>
-      <c:overlay val="0"/>
-      <c:txPr>
-        <a:bodyPr anchorCtr="1"/>
-        <a:lstStyle/>
-        <a:p>
-          <a:pPr>
-            <a:defRPr sz="975">
-              <a:solidFill>
-                <a:srgbClr val="000000"/>
-              </a:solidFill>
-            </a:defRPr>
-          </a:pPr>
-          <a:endParaRPr lang="en-US"/>
-        </a:p>
-      </c:txPr>
-    </c:legend>
     <c:plotVisOnly val="1"/>
     <c:dispBlanksAs val="zero"/>
     <c:showDLblsOverMax val="1"/>
@@ -1972,6 +1543,81 @@
 </p:notes>
 </file>
 
+<file path=ppt/notesSlides/notesSlide12.xml><?xml version="1.0" encoding="utf-8"?>
+<p:notes xmlns:a="http://schemas.openxmlformats.org/drawingml/2006/main" xmlns:r="http://schemas.openxmlformats.org/officeDocument/2006/relationships" xmlns:p="http://schemas.openxmlformats.org/presentationml/2006/main">
+  <p:cSld>
+    <p:spTree>
+      <p:nvGrpSpPr>
+        <p:cNvPr id="1" name=""/>
+        <p:cNvGrpSpPr/>
+        <p:nvPr/>
+      </p:nvGrpSpPr>
+      <p:grpSpPr>
+        <a:xfrm>
+          <a:off x="0" y="0"/>
+          <a:ext cx="0" cy="0"/>
+          <a:chOff x="0" y="0"/>
+          <a:chExt cx="0" cy="0"/>
+        </a:xfrm>
+      </p:grpSpPr>
+      <p:sp>
+        <p:nvSpPr>
+          <p:cNvPr id="2" name="Slide Image Placeholder 1"/>
+          <p:cNvSpPr>
+            <a:spLocks noGrp="1" noRot="1" noChangeAspect="1"/>
+          </p:cNvSpPr>
+          <p:nvPr>
+            <p:ph type="sldImg"/>
+          </p:nvPr>
+        </p:nvSpPr>
+        <p:spPr/>
+      </p:sp>
+      <p:sp>
+        <p:nvSpPr>
+          <p:cNvPr id="3" name="Notes Placeholder 2"/>
+          <p:cNvSpPr>
+            <a:spLocks noGrp="1"/>
+          </p:cNvSpPr>
+          <p:nvPr>
+            <p:ph type="body" idx="1"/>
+          </p:nvPr>
+        </p:nvSpPr>
+        <p:spPr/>
+        <p:txBody>
+          <a:bodyPr/>
+          <a:lstStyle/>
+          <a:p>
+            <a:endParaRPr dirty="0"/>
+          </a:p>
+        </p:txBody>
+      </p:sp>
+      <p:sp>
+        <p:nvSpPr>
+          <p:cNvPr id="4" name="Slide Number Placeholder 3"/>
+          <p:cNvSpPr>
+            <a:spLocks noGrp="1"/>
+          </p:cNvSpPr>
+          <p:nvPr>
+            <p:ph type="sldNum" idx="5"/>
+          </p:nvPr>
+        </p:nvSpPr>
+        <p:spPr/>
+        <p:txBody>
+          <a:bodyPr/>
+          <a:lstStyle/>
+          <a:p>
+            <a:endParaRPr/>
+          </a:p>
+        </p:txBody>
+      </p:sp>
+    </p:spTree>
+  </p:cSld>
+  <p:clrMapOvr>
+    <a:masterClrMapping/>
+  </p:clrMapOvr>
+</p:notes>
+</file>
+
 <file path=ppt/notesSlides/notesSlide2.xml><?xml version="1.0" encoding="utf-8"?>
 <p:notes xmlns:a="http://schemas.openxmlformats.org/drawingml/2006/main" xmlns:r="http://schemas.openxmlformats.org/officeDocument/2006/relationships" xmlns:p="http://schemas.openxmlformats.org/presentationml/2006/main">
   <p:cSld>
@@ -2502,7 +2148,13 @@
   <p:cSld>
     <p:spTree>
       <p:nvGrpSpPr>
-        <p:cNvPr id="1" name=""/>
+        <p:cNvPr id="1" name="">
+          <a:extLst>
+            <a:ext uri="{FF2B5EF4-FFF2-40B4-BE49-F238E27FC236}">
+              <a16:creationId xmlns:a16="http://schemas.microsoft.com/office/drawing/2014/main" id="{1494A413-8D5A-523C-A1F1-F90C94260AB5}"/>
+            </a:ext>
+          </a:extLst>
+        </p:cNvPr>
         <p:cNvGrpSpPr/>
         <p:nvPr/>
       </p:nvGrpSpPr>
@@ -2516,7 +2168,13 @@
       </p:grpSpPr>
       <p:sp>
         <p:nvSpPr>
-          <p:cNvPr id="2" name="Slide Image Placeholder 1"/>
+          <p:cNvPr id="2" name="Slide Image Placeholder 1">
+            <a:extLst>
+              <a:ext uri="{FF2B5EF4-FFF2-40B4-BE49-F238E27FC236}">
+                <a16:creationId xmlns:a16="http://schemas.microsoft.com/office/drawing/2014/main" id="{A0825AF6-1775-A432-620A-D519852B2EE8}"/>
+              </a:ext>
+            </a:extLst>
+          </p:cNvPr>
           <p:cNvSpPr>
             <a:spLocks noGrp="1" noRot="1" noChangeAspect="1"/>
           </p:cNvSpPr>
@@ -2528,7 +2186,13 @@
       </p:sp>
       <p:sp>
         <p:nvSpPr>
-          <p:cNvPr id="3" name="Notes Placeholder 2"/>
+          <p:cNvPr id="3" name="Notes Placeholder 2">
+            <a:extLst>
+              <a:ext uri="{FF2B5EF4-FFF2-40B4-BE49-F238E27FC236}">
+                <a16:creationId xmlns:a16="http://schemas.microsoft.com/office/drawing/2014/main" id="{7B7E8C3E-5CC6-F4D4-93FF-2B61EFB01B86}"/>
+              </a:ext>
+            </a:extLst>
+          </p:cNvPr>
           <p:cNvSpPr>
             <a:spLocks noGrp="1"/>
           </p:cNvSpPr>
@@ -2547,7 +2211,13 @@
       </p:sp>
       <p:sp>
         <p:nvSpPr>
-          <p:cNvPr id="4" name="Slide Number Placeholder 3"/>
+          <p:cNvPr id="4" name="Slide Number Placeholder 3">
+            <a:extLst>
+              <a:ext uri="{FF2B5EF4-FFF2-40B4-BE49-F238E27FC236}">
+                <a16:creationId xmlns:a16="http://schemas.microsoft.com/office/drawing/2014/main" id="{BD22EFE1-FD98-D3E6-A59B-C19A0DEE1C3B}"/>
+              </a:ext>
+            </a:extLst>
+          </p:cNvPr>
           <p:cNvSpPr>
             <a:spLocks noGrp="1"/>
           </p:cNvSpPr>
@@ -2565,6 +2235,11 @@
         </p:txBody>
       </p:sp>
     </p:spTree>
+    <p:extLst>
+      <p:ext uri="{BB962C8B-B14F-4D97-AF65-F5344CB8AC3E}">
+        <p14:creationId xmlns:p14="http://schemas.microsoft.com/office/powerpoint/2010/main" val="1057988617"/>
+      </p:ext>
+    </p:extLst>
   </p:cSld>
   <p:clrMapOvr>
     <a:masterClrMapping/>
@@ -3059,7 +2734,7 @@
               </a:defRPr>
             </a:pPr>
             <a:r>
-              <a:rPr sz="5250" b="1">
+              <a:rPr sz="6000" b="1" dirty="0">
                 <a:solidFill>
                   <a:srgbClr val="000000"/>
                 </a:solidFill>
@@ -3069,6 +2744,14 @@
               </a:rPr>
               <a:t>Customer</a:t>
             </a:r>
+            <a:endParaRPr lang="en-US" sz="6000" b="1" dirty="0">
+              <a:solidFill>
+                <a:srgbClr val="000000"/>
+              </a:solidFill>
+              <a:latin typeface="Helvetica Neue"/>
+              <a:ea typeface="Helvetica Neue"/>
+              <a:cs typeface="Helvetica Neue"/>
+            </a:endParaRPr>
           </a:p>
           <a:p>
             <a:pPr algn="l">
@@ -3082,7 +2765,7 @@
               </a:defRPr>
             </a:pPr>
             <a:r>
-              <a:rPr sz="5250" b="1">
+              <a:rPr lang="en-US" sz="6000" b="1" dirty="0">
                 <a:solidFill>
                   <a:srgbClr val="000000"/>
                 </a:solidFill>
@@ -3105,7 +2788,7 @@
               </a:defRPr>
             </a:pPr>
             <a:r>
-              <a:rPr sz="5250" b="1">
+              <a:rPr sz="6000" b="1" dirty="0">
                 <a:solidFill>
                   <a:srgbClr val="000000"/>
                 </a:solidFill>
@@ -3161,7 +2844,7 @@
               </a:defRPr>
             </a:pPr>
             <a:r>
-              <a:rPr sz="1800" b="0">
+              <a:rPr sz="1800" b="0" dirty="0">
                 <a:solidFill>
                   <a:srgbClr val="4B5563"/>
                 </a:solidFill>
@@ -3478,10 +3161,10 @@
       </p:grpSpPr>
       <p:sp>
         <p:nvSpPr>
-          <p:cNvPr id="14" name="Rectangle 13">
-            <a:extLst>
-              <a:ext uri="{FF2B5EF4-FFF2-40B4-BE49-F238E27FC236}">
-                <a16:creationId xmlns:a16="http://schemas.microsoft.com/office/drawing/2014/main" id="{C7286A33-6FFE-4CB3-8FCE-1840E7827124}"/>
+          <p:cNvPr id="11" name="Rectangle 10">
+            <a:extLst>
+              <a:ext uri="{FF2B5EF4-FFF2-40B4-BE49-F238E27FC236}">
+                <a16:creationId xmlns:a16="http://schemas.microsoft.com/office/drawing/2014/main" id="{1E5E42F8-1808-4B26-BB42-128259CA0B18}"/>
               </a:ext>
             </a:extLst>
           </p:cNvPr>
@@ -3527,7 +3210,7 @@
                 <a:ea typeface="Helvetica Neue"/>
                 <a:cs typeface="Helvetica Neue"/>
               </a:rPr>
-              <a:t>The completed LLM layer converts model output into retention advice</a:t>
+              <a:t>Threshold tuning changed which model looked most useful for retention</a:t>
             </a:r>
           </a:p>
         </p:txBody>
@@ -3537,7 +3220,7 @@
           <p:cNvPr id="2" name="Rectangle 1">
             <a:extLst>
               <a:ext uri="{FF2B5EF4-FFF2-40B4-BE49-F238E27FC236}">
-                <a16:creationId xmlns:a16="http://schemas.microsoft.com/office/drawing/2014/main" id="{FC7AFCFB-8B44-43E4-A05F-FAFFBE119917}"/>
+                <a16:creationId xmlns:a16="http://schemas.microsoft.com/office/drawing/2014/main" id="{4E398746-D9C5-4D24-82FD-AFC8235814B7}"/>
               </a:ext>
             </a:extLst>
           </p:cNvPr>
@@ -3576,6 +3259,1458 @@
             </a:pPr>
             <a:r>
               <a:rPr sz="1650" b="0">
+                <a:solidFill>
+                  <a:srgbClr val="4B5563"/>
+                </a:solidFill>
+                <a:latin typeface="Helvetica Neue"/>
+                <a:ea typeface="Helvetica Neue"/>
+                <a:cs typeface="Helvetica Neue"/>
+              </a:rPr>
+              <a:t>For retention, catching churners can matter more than preserving the highest overall accuracy.</a:t>
+            </a:r>
+          </a:p>
+        </p:txBody>
+      </p:sp>
+      <p:sp>
+        <p:nvSpPr>
+          <p:cNvPr id="4" name="Rectangle 3">
+            <a:extLst>
+              <a:ext uri="{FF2B5EF4-FFF2-40B4-BE49-F238E27FC236}">
+                <a16:creationId xmlns:a16="http://schemas.microsoft.com/office/drawing/2014/main" id="{EA62756C-C961-4AC8-BD4F-784282E5766A}"/>
+              </a:ext>
+            </a:extLst>
+          </p:cNvPr>
+          <p:cNvSpPr>
+            <a:spLocks noGrp="1"/>
+          </p:cNvSpPr>
+          <p:nvPr/>
+        </p:nvSpPr>
+        <p:spPr>
+          <a:xfrm>
+            <a:off x="8096250" y="2000250"/>
+            <a:ext cx="3048000" cy="1428750"/>
+          </a:xfrm>
+          <a:prstGeom prst="rect">
+            <a:avLst/>
+          </a:prstGeom>
+          <a:solidFill>
+            <a:srgbClr val="EAF5FB"/>
+          </a:solidFill>
+          <a:ln w="9525">
+            <a:solidFill>
+              <a:srgbClr val="B8BCC4"/>
+            </a:solidFill>
+            <a:prstDash val="solid"/>
+          </a:ln>
+        </p:spPr>
+        <p:txBody>
+          <a:bodyPr/>
+          <a:lstStyle/>
+          <a:p>
+            <a:endParaRPr lang="en-US"/>
+          </a:p>
+        </p:txBody>
+      </p:sp>
+      <p:sp>
+        <p:nvSpPr>
+          <p:cNvPr id="5" name="Rectangle 4">
+            <a:extLst>
+              <a:ext uri="{FF2B5EF4-FFF2-40B4-BE49-F238E27FC236}">
+                <a16:creationId xmlns:a16="http://schemas.microsoft.com/office/drawing/2014/main" id="{E77118AD-14F9-4732-8D37-58B860FE76E2}"/>
+              </a:ext>
+            </a:extLst>
+          </p:cNvPr>
+          <p:cNvSpPr>
+            <a:spLocks noGrp="1"/>
+          </p:cNvSpPr>
+          <p:nvPr/>
+        </p:nvSpPr>
+        <p:spPr>
+          <a:xfrm>
+            <a:off x="8382000" y="2247900"/>
+            <a:ext cx="2476500" cy="323850"/>
+          </a:xfrm>
+          <a:prstGeom prst="rect">
+            <a:avLst/>
+          </a:prstGeom>
+          <a:noFill/>
+          <a:ln w="0">
+            <a:noFill/>
+            <a:prstDash val="solid"/>
+          </a:ln>
+        </p:spPr>
+        <p:txBody>
+          <a:bodyPr anchor="t"/>
+          <a:lstStyle/>
+          <a:p>
+            <a:pPr algn="ctr">
+              <a:defRPr sz="1875" b="1">
+                <a:solidFill>
+                  <a:srgbClr val="000000"/>
+                </a:solidFill>
+                <a:latin typeface="Helvetica Neue"/>
+                <a:ea typeface="Helvetica Neue"/>
+                <a:cs typeface="Helvetica Neue"/>
+              </a:defRPr>
+            </a:pPr>
+            <a:r>
+              <a:rPr sz="1875" b="1">
+                <a:solidFill>
+                  <a:srgbClr val="000000"/>
+                </a:solidFill>
+                <a:latin typeface="Helvetica Neue"/>
+                <a:ea typeface="Helvetica Neue"/>
+                <a:cs typeface="Helvetica Neue"/>
+              </a:rPr>
+              <a:t>Best balance</a:t>
+            </a:r>
+          </a:p>
+        </p:txBody>
+      </p:sp>
+      <p:sp>
+        <p:nvSpPr>
+          <p:cNvPr id="6" name="Rectangle 5">
+            <a:extLst>
+              <a:ext uri="{FF2B5EF4-FFF2-40B4-BE49-F238E27FC236}">
+                <a16:creationId xmlns:a16="http://schemas.microsoft.com/office/drawing/2014/main" id="{73278101-7D77-4E40-9556-7FEDA40C40FF}"/>
+              </a:ext>
+            </a:extLst>
+          </p:cNvPr>
+          <p:cNvSpPr>
+            <a:spLocks noGrp="1"/>
+          </p:cNvSpPr>
+          <p:nvPr/>
+        </p:nvSpPr>
+        <p:spPr>
+          <a:xfrm>
+            <a:off x="8382000" y="2647950"/>
+            <a:ext cx="2476500" cy="419100"/>
+          </a:xfrm>
+          <a:prstGeom prst="rect">
+            <a:avLst/>
+          </a:prstGeom>
+          <a:noFill/>
+          <a:ln w="0">
+            <a:noFill/>
+            <a:prstDash val="solid"/>
+          </a:ln>
+        </p:spPr>
+        <p:txBody>
+          <a:bodyPr anchor="t"/>
+          <a:lstStyle/>
+          <a:p>
+            <a:pPr algn="ctr">
+              <a:defRPr sz="1275" b="0">
+                <a:solidFill>
+                  <a:srgbClr val="4B5563"/>
+                </a:solidFill>
+                <a:latin typeface="Helvetica Neue"/>
+                <a:ea typeface="Helvetica Neue"/>
+                <a:cs typeface="Helvetica Neue"/>
+              </a:defRPr>
+            </a:pPr>
+            <a:r>
+              <a:rPr sz="1275" b="0" dirty="0">
+                <a:solidFill>
+                  <a:srgbClr val="4B5563"/>
+                </a:solidFill>
+                <a:latin typeface="Helvetica Neue"/>
+                <a:ea typeface="Helvetica Neue"/>
+                <a:cs typeface="Helvetica Neue"/>
+              </a:rPr>
+              <a:t>Decision Tree at 0.3077 improved F1 to 63% while keeping 84% accuracy.</a:t>
+            </a:r>
+          </a:p>
+        </p:txBody>
+      </p:sp>
+      <p:sp>
+        <p:nvSpPr>
+          <p:cNvPr id="7" name="Rectangle 6">
+            <a:extLst>
+              <a:ext uri="{FF2B5EF4-FFF2-40B4-BE49-F238E27FC236}">
+                <a16:creationId xmlns:a16="http://schemas.microsoft.com/office/drawing/2014/main" id="{CE1F597D-E8E5-4525-876A-8588C7EFE7AB}"/>
+              </a:ext>
+            </a:extLst>
+          </p:cNvPr>
+          <p:cNvSpPr>
+            <a:spLocks noGrp="1"/>
+          </p:cNvSpPr>
+          <p:nvPr/>
+        </p:nvSpPr>
+        <p:spPr>
+          <a:xfrm>
+            <a:off x="8096250" y="3619499"/>
+            <a:ext cx="3048000" cy="1428749"/>
+          </a:xfrm>
+          <a:prstGeom prst="rect">
+            <a:avLst/>
+          </a:prstGeom>
+          <a:solidFill>
+            <a:srgbClr val="F2F2F2"/>
+          </a:solidFill>
+          <a:ln w="0">
+            <a:noFill/>
+            <a:prstDash val="solid"/>
+          </a:ln>
+        </p:spPr>
+        <p:txBody>
+          <a:bodyPr/>
+          <a:lstStyle/>
+          <a:p>
+            <a:endParaRPr lang="en-US"/>
+          </a:p>
+        </p:txBody>
+      </p:sp>
+      <p:sp>
+        <p:nvSpPr>
+          <p:cNvPr id="8" name="Rectangle 7">
+            <a:extLst>
+              <a:ext uri="{FF2B5EF4-FFF2-40B4-BE49-F238E27FC236}">
+                <a16:creationId xmlns:a16="http://schemas.microsoft.com/office/drawing/2014/main" id="{6C381C06-85AB-4E18-B078-FABFA99871B1}"/>
+              </a:ext>
+            </a:extLst>
+          </p:cNvPr>
+          <p:cNvSpPr>
+            <a:spLocks noGrp="1"/>
+          </p:cNvSpPr>
+          <p:nvPr/>
+        </p:nvSpPr>
+        <p:spPr>
+          <a:xfrm>
+            <a:off x="8382000" y="3867150"/>
+            <a:ext cx="2476500" cy="323850"/>
+          </a:xfrm>
+          <a:prstGeom prst="rect">
+            <a:avLst/>
+          </a:prstGeom>
+          <a:noFill/>
+          <a:ln w="0">
+            <a:noFill/>
+            <a:prstDash val="solid"/>
+          </a:ln>
+        </p:spPr>
+        <p:txBody>
+          <a:bodyPr anchor="t"/>
+          <a:lstStyle/>
+          <a:p>
+            <a:pPr algn="ctr">
+              <a:defRPr sz="1875" b="1">
+                <a:solidFill>
+                  <a:srgbClr val="000000"/>
+                </a:solidFill>
+                <a:latin typeface="Helvetica Neue"/>
+                <a:ea typeface="Helvetica Neue"/>
+                <a:cs typeface="Helvetica Neue"/>
+              </a:defRPr>
+            </a:pPr>
+            <a:r>
+              <a:rPr sz="1875" b="1">
+                <a:solidFill>
+                  <a:srgbClr val="000000"/>
+                </a:solidFill>
+                <a:latin typeface="Helvetica Neue"/>
+                <a:ea typeface="Helvetica Neue"/>
+                <a:cs typeface="Helvetica Neue"/>
+              </a:rPr>
+              <a:t>Highest recall</a:t>
+            </a:r>
+          </a:p>
+        </p:txBody>
+      </p:sp>
+      <p:sp>
+        <p:nvSpPr>
+          <p:cNvPr id="9" name="Rectangle 8">
+            <a:extLst>
+              <a:ext uri="{FF2B5EF4-FFF2-40B4-BE49-F238E27FC236}">
+                <a16:creationId xmlns:a16="http://schemas.microsoft.com/office/drawing/2014/main" id="{201E9E69-97C4-4BFC-B8C1-81FEC2D16344}"/>
+              </a:ext>
+            </a:extLst>
+          </p:cNvPr>
+          <p:cNvSpPr>
+            <a:spLocks noGrp="1"/>
+          </p:cNvSpPr>
+          <p:nvPr/>
+        </p:nvSpPr>
+        <p:spPr>
+          <a:xfrm>
+            <a:off x="8382000" y="4267200"/>
+            <a:ext cx="2476500" cy="419100"/>
+          </a:xfrm>
+          <a:prstGeom prst="rect">
+            <a:avLst/>
+          </a:prstGeom>
+          <a:noFill/>
+          <a:ln w="0">
+            <a:noFill/>
+            <a:prstDash val="solid"/>
+          </a:ln>
+        </p:spPr>
+        <p:txBody>
+          <a:bodyPr anchor="t"/>
+          <a:lstStyle/>
+          <a:p>
+            <a:pPr algn="ctr">
+              <a:defRPr sz="1275" b="0">
+                <a:solidFill>
+                  <a:srgbClr val="4B5563"/>
+                </a:solidFill>
+                <a:latin typeface="Helvetica Neue"/>
+                <a:ea typeface="Helvetica Neue"/>
+                <a:cs typeface="Helvetica Neue"/>
+              </a:defRPr>
+            </a:pPr>
+            <a:r>
+              <a:rPr sz="1275" b="0">
+                <a:solidFill>
+                  <a:srgbClr val="4B5563"/>
+                </a:solidFill>
+                <a:latin typeface="Helvetica Neue"/>
+                <a:ea typeface="Helvetica Neue"/>
+                <a:cs typeface="Helvetica Neue"/>
+              </a:rPr>
+              <a:t>Random Forest at 0.1985 caught 77% of churners, but accuracy dropped to 78%.</a:t>
+            </a:r>
+          </a:p>
+        </p:txBody>
+      </p:sp>
+      <p:sp>
+        <p:nvSpPr>
+          <p:cNvPr id="10" name="Rectangle 9">
+            <a:extLst>
+              <a:ext uri="{FF2B5EF4-FFF2-40B4-BE49-F238E27FC236}">
+                <a16:creationId xmlns:a16="http://schemas.microsoft.com/office/drawing/2014/main" id="{FAA76FC4-61D1-48FF-A360-271F6E3C143C}"/>
+              </a:ext>
+            </a:extLst>
+          </p:cNvPr>
+          <p:cNvSpPr>
+            <a:spLocks noGrp="1"/>
+          </p:cNvSpPr>
+          <p:nvPr/>
+        </p:nvSpPr>
+        <p:spPr>
+          <a:xfrm>
+            <a:off x="11277600" y="6286500"/>
+            <a:ext cx="523875" cy="228600"/>
+          </a:xfrm>
+          <a:prstGeom prst="rect">
+            <a:avLst/>
+          </a:prstGeom>
+          <a:noFill/>
+          <a:ln w="0">
+            <a:noFill/>
+            <a:prstDash val="solid"/>
+          </a:ln>
+        </p:spPr>
+        <p:txBody>
+          <a:bodyPr anchor="b"/>
+          <a:lstStyle/>
+          <a:p>
+            <a:pPr algn="r">
+              <a:defRPr sz="975" b="0">
+                <a:solidFill>
+                  <a:srgbClr val="000000"/>
+                </a:solidFill>
+                <a:latin typeface="Helvetica Neue"/>
+                <a:ea typeface="Helvetica Neue"/>
+                <a:cs typeface="Helvetica Neue"/>
+              </a:defRPr>
+            </a:pPr>
+            <a:r>
+              <a:rPr sz="975" b="0">
+                <a:solidFill>
+                  <a:srgbClr val="000000"/>
+                </a:solidFill>
+                <a:latin typeface="Helvetica Neue"/>
+                <a:ea typeface="Helvetica Neue"/>
+                <a:cs typeface="Helvetica Neue"/>
+              </a:rPr>
+              <a:t>09</a:t>
+            </a:r>
+          </a:p>
+        </p:txBody>
+      </p:sp>
+      <p:graphicFrame>
+        <p:nvGraphicFramePr>
+          <p:cNvPr id="12" name="Table 11">
+            <a:extLst>
+              <a:ext uri="{FF2B5EF4-FFF2-40B4-BE49-F238E27FC236}">
+                <a16:creationId xmlns:a16="http://schemas.microsoft.com/office/drawing/2014/main" id="{FEB2655D-D3DD-36D3-C1F8-7552FD318152}"/>
+              </a:ext>
+            </a:extLst>
+          </p:cNvPr>
+          <p:cNvGraphicFramePr>
+            <a:graphicFrameLocks noGrp="1"/>
+          </p:cNvGraphicFramePr>
+          <p:nvPr>
+            <p:extLst>
+              <p:ext uri="{D42A27DB-BD31-4B8C-83A1-F6EECF244321}">
+                <p14:modId xmlns:p14="http://schemas.microsoft.com/office/powerpoint/2010/main" val="2021737943"/>
+              </p:ext>
+            </p:extLst>
+          </p:nvPr>
+        </p:nvGraphicFramePr>
+        <p:xfrm>
+          <a:off x="323851" y="2000250"/>
+          <a:ext cx="7543800" cy="3497580"/>
+        </p:xfrm>
+        <a:graphic>
+          <a:graphicData uri="http://schemas.openxmlformats.org/drawingml/2006/table">
+            <a:tbl>
+              <a:tblPr firstRow="1">
+                <a:tableStyleId>{793D81CF-94F2-401A-BA57-92F5A7B2D0C5}</a:tableStyleId>
+              </a:tblPr>
+              <a:tblGrid>
+                <a:gridCol w="2103120">
+                  <a:extLst>
+                    <a:ext uri="{9D8B030D-6E8A-4147-A177-3AD203B41FA5}">
+                      <a16:colId xmlns:a16="http://schemas.microsoft.com/office/drawing/2014/main" val="2427971076"/>
+                    </a:ext>
+                  </a:extLst>
+                </a:gridCol>
+                <a:gridCol w="2103120">
+                  <a:extLst>
+                    <a:ext uri="{9D8B030D-6E8A-4147-A177-3AD203B41FA5}">
+                      <a16:colId xmlns:a16="http://schemas.microsoft.com/office/drawing/2014/main" val="2983566134"/>
+                    </a:ext>
+                  </a:extLst>
+                </a:gridCol>
+                <a:gridCol w="876300">
+                  <a:extLst>
+                    <a:ext uri="{9D8B030D-6E8A-4147-A177-3AD203B41FA5}">
+                      <a16:colId xmlns:a16="http://schemas.microsoft.com/office/drawing/2014/main" val="858143184"/>
+                    </a:ext>
+                  </a:extLst>
+                </a:gridCol>
+                <a:gridCol w="1200150">
+                  <a:extLst>
+                    <a:ext uri="{9D8B030D-6E8A-4147-A177-3AD203B41FA5}">
+                      <a16:colId xmlns:a16="http://schemas.microsoft.com/office/drawing/2014/main" val="1452986485"/>
+                    </a:ext>
+                  </a:extLst>
+                </a:gridCol>
+                <a:gridCol w="1261110">
+                  <a:extLst>
+                    <a:ext uri="{9D8B030D-6E8A-4147-A177-3AD203B41FA5}">
+                      <a16:colId xmlns:a16="http://schemas.microsoft.com/office/drawing/2014/main" val="233761185"/>
+                    </a:ext>
+                  </a:extLst>
+                </a:gridCol>
+              </a:tblGrid>
+              <a:tr h="0">
+                <a:tc>
+                  <a:txBody>
+                    <a:bodyPr/>
+                    <a:lstStyle/>
+                    <a:p>
+                      <a:pPr>
+                        <a:buNone/>
+                      </a:pPr>
+                      <a:r>
+                        <a:rPr lang="en-SA" b="1" dirty="0">
+                          <a:effectLst/>
+                        </a:rPr>
+                        <a:t>Model</a:t>
+                      </a:r>
+                    </a:p>
+                  </a:txBody>
+                  <a:tcPr marL="95250" marR="95250" marT="57150" marB="57150" anchor="ctr"/>
+                </a:tc>
+                <a:tc>
+                  <a:txBody>
+                    <a:bodyPr/>
+                    <a:lstStyle/>
+                    <a:p>
+                      <a:pPr>
+                        <a:buNone/>
+                      </a:pPr>
+                      <a:r>
+                        <a:rPr lang="en-SA" b="1" dirty="0">
+                          <a:effectLst/>
+                        </a:rPr>
+                        <a:t>Threshold</a:t>
+                      </a:r>
+                    </a:p>
+                  </a:txBody>
+                  <a:tcPr marL="95250" marR="95250" marT="57150" marB="57150" anchor="ctr"/>
+                </a:tc>
+                <a:tc>
+                  <a:txBody>
+                    <a:bodyPr/>
+                    <a:lstStyle/>
+                    <a:p>
+                      <a:pPr>
+                        <a:buNone/>
+                      </a:pPr>
+                      <a:r>
+                        <a:rPr lang="en-SA" b="1" dirty="0">
+                          <a:effectLst/>
+                        </a:rPr>
+                        <a:t>Recall</a:t>
+                      </a:r>
+                    </a:p>
+                  </a:txBody>
+                  <a:tcPr marL="95250" marR="95250" marT="57150" marB="57150" anchor="ctr"/>
+                </a:tc>
+                <a:tc>
+                  <a:txBody>
+                    <a:bodyPr/>
+                    <a:lstStyle/>
+                    <a:p>
+                      <a:pPr>
+                        <a:buNone/>
+                      </a:pPr>
+                      <a:r>
+                        <a:rPr lang="en-SA" b="1">
+                          <a:effectLst/>
+                        </a:rPr>
+                        <a:t>F1-Score</a:t>
+                      </a:r>
+                    </a:p>
+                  </a:txBody>
+                  <a:tcPr marL="95250" marR="95250" marT="57150" marB="57150" anchor="ctr"/>
+                </a:tc>
+                <a:tc>
+                  <a:txBody>
+                    <a:bodyPr/>
+                    <a:lstStyle/>
+                    <a:p>
+                      <a:pPr>
+                        <a:buNone/>
+                      </a:pPr>
+                      <a:r>
+                        <a:rPr lang="en-SA" b="1" dirty="0">
+                          <a:effectLst/>
+                        </a:rPr>
+                        <a:t>Accuracy</a:t>
+                      </a:r>
+                    </a:p>
+                  </a:txBody>
+                  <a:tcPr marL="95250" marR="95250" marT="57150" marB="57150" anchor="ctr"/>
+                </a:tc>
+                <a:extLst>
+                  <a:ext uri="{0D108BD9-81ED-4DB2-BD59-A6C34878D82A}">
+                    <a16:rowId xmlns:a16="http://schemas.microsoft.com/office/drawing/2014/main" val="859574189"/>
+                  </a:ext>
+                </a:extLst>
+              </a:tr>
+              <a:tr h="0">
+                <a:tc>
+                  <a:txBody>
+                    <a:bodyPr/>
+                    <a:lstStyle/>
+                    <a:p>
+                      <a:pPr>
+                        <a:buNone/>
+                      </a:pPr>
+                      <a:r>
+                        <a:rPr lang="en-SA">
+                          <a:effectLst/>
+                        </a:rPr>
+                        <a:t>Logistic Regression</a:t>
+                      </a:r>
+                    </a:p>
+                  </a:txBody>
+                  <a:tcPr marL="95250" marR="95250" marT="57150" marB="57150" anchor="ctr"/>
+                </a:tc>
+                <a:tc>
+                  <a:txBody>
+                    <a:bodyPr/>
+                    <a:lstStyle/>
+                    <a:p>
+                      <a:pPr>
+                        <a:buNone/>
+                      </a:pPr>
+                      <a:r>
+                        <a:rPr lang="en-SA" dirty="0">
+                          <a:effectLst/>
+                        </a:rPr>
+                        <a:t>0.5000 (default)</a:t>
+                      </a:r>
+                    </a:p>
+                  </a:txBody>
+                  <a:tcPr marL="95250" marR="95250" marT="57150" marB="57150" anchor="ctr"/>
+                </a:tc>
+                <a:tc>
+                  <a:txBody>
+                    <a:bodyPr/>
+                    <a:lstStyle/>
+                    <a:p>
+                      <a:pPr>
+                        <a:buNone/>
+                      </a:pPr>
+                      <a:r>
+                        <a:rPr lang="en-SA">
+                          <a:effectLst/>
+                        </a:rPr>
+                        <a:t>75%</a:t>
+                      </a:r>
+                    </a:p>
+                  </a:txBody>
+                  <a:tcPr marL="95250" marR="95250" marT="57150" marB="57150" anchor="ctr"/>
+                </a:tc>
+                <a:tc>
+                  <a:txBody>
+                    <a:bodyPr/>
+                    <a:lstStyle/>
+                    <a:p>
+                      <a:pPr>
+                        <a:buNone/>
+                      </a:pPr>
+                      <a:r>
+                        <a:rPr lang="en-SA">
+                          <a:effectLst/>
+                        </a:rPr>
+                        <a:t>59%</a:t>
+                      </a:r>
+                    </a:p>
+                  </a:txBody>
+                  <a:tcPr marL="95250" marR="95250" marT="57150" marB="57150" anchor="ctr"/>
+                </a:tc>
+                <a:tc>
+                  <a:txBody>
+                    <a:bodyPr/>
+                    <a:lstStyle/>
+                    <a:p>
+                      <a:pPr>
+                        <a:buNone/>
+                      </a:pPr>
+                      <a:r>
+                        <a:rPr lang="en-SA">
+                          <a:effectLst/>
+                        </a:rPr>
+                        <a:t>79%</a:t>
+                      </a:r>
+                    </a:p>
+                  </a:txBody>
+                  <a:tcPr marL="95250" marR="95250" marT="57150" marB="57150" anchor="ctr"/>
+                </a:tc>
+                <a:extLst>
+                  <a:ext uri="{0D108BD9-81ED-4DB2-BD59-A6C34878D82A}">
+                    <a16:rowId xmlns:a16="http://schemas.microsoft.com/office/drawing/2014/main" val="2274526745"/>
+                  </a:ext>
+                </a:extLst>
+              </a:tr>
+              <a:tr h="0">
+                <a:tc>
+                  <a:txBody>
+                    <a:bodyPr/>
+                    <a:lstStyle/>
+                    <a:p>
+                      <a:pPr>
+                        <a:buNone/>
+                      </a:pPr>
+                      <a:r>
+                        <a:rPr lang="en-SA">
+                          <a:effectLst/>
+                        </a:rPr>
+                        <a:t>Logistic Regression</a:t>
+                      </a:r>
+                    </a:p>
+                  </a:txBody>
+                  <a:tcPr marL="95250" marR="95250" marT="57150" marB="57150" anchor="ctr"/>
+                </a:tc>
+                <a:tc>
+                  <a:txBody>
+                    <a:bodyPr/>
+                    <a:lstStyle/>
+                    <a:p>
+                      <a:pPr>
+                        <a:buNone/>
+                      </a:pPr>
+                      <a:r>
+                        <a:rPr lang="en-SA" dirty="0">
+                          <a:effectLst/>
+                        </a:rPr>
+                        <a:t>0.5000 (best)</a:t>
+                      </a:r>
+                    </a:p>
+                  </a:txBody>
+                  <a:tcPr marL="95250" marR="95250" marT="57150" marB="57150" anchor="ctr"/>
+                </a:tc>
+                <a:tc>
+                  <a:txBody>
+                    <a:bodyPr/>
+                    <a:lstStyle/>
+                    <a:p>
+                      <a:pPr>
+                        <a:buNone/>
+                      </a:pPr>
+                      <a:r>
+                        <a:rPr lang="en-SA">
+                          <a:effectLst/>
+                        </a:rPr>
+                        <a:t>75%</a:t>
+                      </a:r>
+                    </a:p>
+                  </a:txBody>
+                  <a:tcPr marL="95250" marR="95250" marT="57150" marB="57150" anchor="ctr"/>
+                </a:tc>
+                <a:tc>
+                  <a:txBody>
+                    <a:bodyPr/>
+                    <a:lstStyle/>
+                    <a:p>
+                      <a:pPr>
+                        <a:buNone/>
+                      </a:pPr>
+                      <a:r>
+                        <a:rPr lang="en-SA">
+                          <a:effectLst/>
+                        </a:rPr>
+                        <a:t>59%</a:t>
+                      </a:r>
+                    </a:p>
+                  </a:txBody>
+                  <a:tcPr marL="95250" marR="95250" marT="57150" marB="57150" anchor="ctr"/>
+                </a:tc>
+                <a:tc>
+                  <a:txBody>
+                    <a:bodyPr/>
+                    <a:lstStyle/>
+                    <a:p>
+                      <a:pPr>
+                        <a:buNone/>
+                      </a:pPr>
+                      <a:r>
+                        <a:rPr lang="en-SA">
+                          <a:effectLst/>
+                        </a:rPr>
+                        <a:t>79%</a:t>
+                      </a:r>
+                    </a:p>
+                  </a:txBody>
+                  <a:tcPr marL="95250" marR="95250" marT="57150" marB="57150" anchor="ctr"/>
+                </a:tc>
+                <a:extLst>
+                  <a:ext uri="{0D108BD9-81ED-4DB2-BD59-A6C34878D82A}">
+                    <a16:rowId xmlns:a16="http://schemas.microsoft.com/office/drawing/2014/main" val="3116176786"/>
+                  </a:ext>
+                </a:extLst>
+              </a:tr>
+              <a:tr h="0">
+                <a:tc>
+                  <a:txBody>
+                    <a:bodyPr/>
+                    <a:lstStyle/>
+                    <a:p>
+                      <a:pPr>
+                        <a:buNone/>
+                      </a:pPr>
+                      <a:r>
+                        <a:rPr lang="en-SA">
+                          <a:effectLst/>
+                        </a:rPr>
+                        <a:t>SVM</a:t>
+                      </a:r>
+                    </a:p>
+                  </a:txBody>
+                  <a:tcPr marL="95250" marR="95250" marT="57150" marB="57150" anchor="ctr"/>
+                </a:tc>
+                <a:tc>
+                  <a:txBody>
+                    <a:bodyPr/>
+                    <a:lstStyle/>
+                    <a:p>
+                      <a:pPr>
+                        <a:buNone/>
+                      </a:pPr>
+                      <a:r>
+                        <a:rPr lang="en-SA" dirty="0">
+                          <a:effectLst/>
+                        </a:rPr>
+                        <a:t>0.5000 (default)</a:t>
+                      </a:r>
+                    </a:p>
+                  </a:txBody>
+                  <a:tcPr marL="95250" marR="95250" marT="57150" marB="57150" anchor="ctr"/>
+                </a:tc>
+                <a:tc>
+                  <a:txBody>
+                    <a:bodyPr/>
+                    <a:lstStyle/>
+                    <a:p>
+                      <a:pPr>
+                        <a:buNone/>
+                      </a:pPr>
+                      <a:r>
+                        <a:rPr lang="en-SA">
+                          <a:effectLst/>
+                        </a:rPr>
+                        <a:t>75%</a:t>
+                      </a:r>
+                    </a:p>
+                  </a:txBody>
+                  <a:tcPr marL="95250" marR="95250" marT="57150" marB="57150" anchor="ctr"/>
+                </a:tc>
+                <a:tc>
+                  <a:txBody>
+                    <a:bodyPr/>
+                    <a:lstStyle/>
+                    <a:p>
+                      <a:pPr>
+                        <a:buNone/>
+                      </a:pPr>
+                      <a:r>
+                        <a:rPr lang="en-SA">
+                          <a:effectLst/>
+                        </a:rPr>
+                        <a:t>59%</a:t>
+                      </a:r>
+                    </a:p>
+                  </a:txBody>
+                  <a:tcPr marL="95250" marR="95250" marT="57150" marB="57150" anchor="ctr"/>
+                </a:tc>
+                <a:tc>
+                  <a:txBody>
+                    <a:bodyPr/>
+                    <a:lstStyle/>
+                    <a:p>
+                      <a:pPr>
+                        <a:buNone/>
+                      </a:pPr>
+                      <a:r>
+                        <a:rPr lang="en-SA">
+                          <a:effectLst/>
+                        </a:rPr>
+                        <a:t>79%</a:t>
+                      </a:r>
+                    </a:p>
+                  </a:txBody>
+                  <a:tcPr marL="95250" marR="95250" marT="57150" marB="57150" anchor="ctr"/>
+                </a:tc>
+                <a:extLst>
+                  <a:ext uri="{0D108BD9-81ED-4DB2-BD59-A6C34878D82A}">
+                    <a16:rowId xmlns:a16="http://schemas.microsoft.com/office/drawing/2014/main" val="412035948"/>
+                  </a:ext>
+                </a:extLst>
+              </a:tr>
+              <a:tr h="0">
+                <a:tc>
+                  <a:txBody>
+                    <a:bodyPr/>
+                    <a:lstStyle/>
+                    <a:p>
+                      <a:pPr>
+                        <a:buNone/>
+                      </a:pPr>
+                      <a:r>
+                        <a:rPr lang="en-SA">
+                          <a:effectLst/>
+                        </a:rPr>
+                        <a:t>SVM</a:t>
+                      </a:r>
+                    </a:p>
+                  </a:txBody>
+                  <a:tcPr marL="95250" marR="95250" marT="57150" marB="57150" anchor="ctr"/>
+                </a:tc>
+                <a:tc>
+                  <a:txBody>
+                    <a:bodyPr/>
+                    <a:lstStyle/>
+                    <a:p>
+                      <a:pPr>
+                        <a:buNone/>
+                      </a:pPr>
+                      <a:r>
+                        <a:rPr lang="en-SA">
+                          <a:effectLst/>
+                        </a:rPr>
+                        <a:t>0.2137 (best)</a:t>
+                      </a:r>
+                    </a:p>
+                  </a:txBody>
+                  <a:tcPr marL="95250" marR="95250" marT="57150" marB="57150" anchor="ctr"/>
+                </a:tc>
+                <a:tc>
+                  <a:txBody>
+                    <a:bodyPr/>
+                    <a:lstStyle/>
+                    <a:p>
+                      <a:pPr>
+                        <a:buNone/>
+                      </a:pPr>
+                      <a:r>
+                        <a:rPr lang="en-SA">
+                          <a:effectLst/>
+                        </a:rPr>
+                        <a:t>75%</a:t>
+                      </a:r>
+                    </a:p>
+                  </a:txBody>
+                  <a:tcPr marL="95250" marR="95250" marT="57150" marB="57150" anchor="ctr"/>
+                </a:tc>
+                <a:tc>
+                  <a:txBody>
+                    <a:bodyPr/>
+                    <a:lstStyle/>
+                    <a:p>
+                      <a:pPr>
+                        <a:buNone/>
+                      </a:pPr>
+                      <a:r>
+                        <a:rPr lang="en-SA">
+                          <a:effectLst/>
+                        </a:rPr>
+                        <a:t>59%</a:t>
+                      </a:r>
+                    </a:p>
+                  </a:txBody>
+                  <a:tcPr marL="95250" marR="95250" marT="57150" marB="57150" anchor="ctr"/>
+                </a:tc>
+                <a:tc>
+                  <a:txBody>
+                    <a:bodyPr/>
+                    <a:lstStyle/>
+                    <a:p>
+                      <a:pPr>
+                        <a:buNone/>
+                      </a:pPr>
+                      <a:r>
+                        <a:rPr lang="en-SA">
+                          <a:effectLst/>
+                        </a:rPr>
+                        <a:t>79%</a:t>
+                      </a:r>
+                    </a:p>
+                  </a:txBody>
+                  <a:tcPr marL="95250" marR="95250" marT="57150" marB="57150" anchor="ctr"/>
+                </a:tc>
+                <a:extLst>
+                  <a:ext uri="{0D108BD9-81ED-4DB2-BD59-A6C34878D82A}">
+                    <a16:rowId xmlns:a16="http://schemas.microsoft.com/office/drawing/2014/main" val="2026688922"/>
+                  </a:ext>
+                </a:extLst>
+              </a:tr>
+              <a:tr h="0">
+                <a:tc>
+                  <a:txBody>
+                    <a:bodyPr/>
+                    <a:lstStyle/>
+                    <a:p>
+                      <a:pPr>
+                        <a:buNone/>
+                      </a:pPr>
+                      <a:r>
+                        <a:rPr lang="en-SA">
+                          <a:effectLst/>
+                        </a:rPr>
+                        <a:t>Decision Tree</a:t>
+                      </a:r>
+                    </a:p>
+                  </a:txBody>
+                  <a:tcPr marL="95250" marR="95250" marT="57150" marB="57150" anchor="ctr"/>
+                </a:tc>
+                <a:tc>
+                  <a:txBody>
+                    <a:bodyPr/>
+                    <a:lstStyle/>
+                    <a:p>
+                      <a:pPr>
+                        <a:buNone/>
+                      </a:pPr>
+                      <a:r>
+                        <a:rPr lang="en-SA" dirty="0">
+                          <a:effectLst/>
+                        </a:rPr>
+                        <a:t>0.5000 (default)</a:t>
+                      </a:r>
+                    </a:p>
+                  </a:txBody>
+                  <a:tcPr marL="95250" marR="95250" marT="57150" marB="57150" anchor="ctr"/>
+                </a:tc>
+                <a:tc>
+                  <a:txBody>
+                    <a:bodyPr/>
+                    <a:lstStyle/>
+                    <a:p>
+                      <a:pPr>
+                        <a:buNone/>
+                      </a:pPr>
+                      <a:r>
+                        <a:rPr lang="en-SA">
+                          <a:effectLst/>
+                        </a:rPr>
+                        <a:t>40%</a:t>
+                      </a:r>
+                    </a:p>
+                  </a:txBody>
+                  <a:tcPr marL="95250" marR="95250" marT="57150" marB="57150" anchor="ctr"/>
+                </a:tc>
+                <a:tc>
+                  <a:txBody>
+                    <a:bodyPr/>
+                    <a:lstStyle/>
+                    <a:p>
+                      <a:pPr>
+                        <a:buNone/>
+                      </a:pPr>
+                      <a:r>
+                        <a:rPr lang="en-SA">
+                          <a:effectLst/>
+                        </a:rPr>
+                        <a:t>55%</a:t>
+                      </a:r>
+                    </a:p>
+                  </a:txBody>
+                  <a:tcPr marL="95250" marR="95250" marT="57150" marB="57150" anchor="ctr"/>
+                </a:tc>
+                <a:tc>
+                  <a:txBody>
+                    <a:bodyPr/>
+                    <a:lstStyle/>
+                    <a:p>
+                      <a:pPr>
+                        <a:buNone/>
+                      </a:pPr>
+                      <a:r>
+                        <a:rPr lang="en-SA">
+                          <a:effectLst/>
+                        </a:rPr>
+                        <a:t>87%</a:t>
+                      </a:r>
+                    </a:p>
+                  </a:txBody>
+                  <a:tcPr marL="95250" marR="95250" marT="57150" marB="57150" anchor="ctr"/>
+                </a:tc>
+                <a:extLst>
+                  <a:ext uri="{0D108BD9-81ED-4DB2-BD59-A6C34878D82A}">
+                    <a16:rowId xmlns:a16="http://schemas.microsoft.com/office/drawing/2014/main" val="1946262471"/>
+                  </a:ext>
+                </a:extLst>
+              </a:tr>
+              <a:tr h="0">
+                <a:tc>
+                  <a:txBody>
+                    <a:bodyPr/>
+                    <a:lstStyle/>
+                    <a:p>
+                      <a:pPr>
+                        <a:buNone/>
+                      </a:pPr>
+                      <a:r>
+                        <a:rPr lang="en-SA">
+                          <a:effectLst/>
+                        </a:rPr>
+                        <a:t>Decision Tree</a:t>
+                      </a:r>
+                    </a:p>
+                  </a:txBody>
+                  <a:tcPr marL="95250" marR="95250" marT="57150" marB="57150" anchor="ctr"/>
+                </a:tc>
+                <a:tc>
+                  <a:txBody>
+                    <a:bodyPr/>
+                    <a:lstStyle/>
+                    <a:p>
+                      <a:pPr>
+                        <a:buNone/>
+                      </a:pPr>
+                      <a:r>
+                        <a:rPr lang="en-SA">
+                          <a:effectLst/>
+                        </a:rPr>
+                        <a:t>0.3077 (best)</a:t>
+                      </a:r>
+                    </a:p>
+                  </a:txBody>
+                  <a:tcPr marL="95250" marR="95250" marT="57150" marB="57150" anchor="ctr"/>
+                </a:tc>
+                <a:tc>
+                  <a:txBody>
+                    <a:bodyPr/>
+                    <a:lstStyle/>
+                    <a:p>
+                      <a:pPr>
+                        <a:buNone/>
+                      </a:pPr>
+                      <a:r>
+                        <a:rPr lang="en-SA">
+                          <a:effectLst/>
+                        </a:rPr>
+                        <a:t>67%</a:t>
+                      </a:r>
+                    </a:p>
+                  </a:txBody>
+                  <a:tcPr marL="95250" marR="95250" marT="57150" marB="57150" anchor="ctr"/>
+                </a:tc>
+                <a:tc>
+                  <a:txBody>
+                    <a:bodyPr/>
+                    <a:lstStyle/>
+                    <a:p>
+                      <a:pPr>
+                        <a:buNone/>
+                      </a:pPr>
+                      <a:r>
+                        <a:rPr lang="en-SA">
+                          <a:effectLst/>
+                        </a:rPr>
+                        <a:t>63%</a:t>
+                      </a:r>
+                    </a:p>
+                  </a:txBody>
+                  <a:tcPr marL="95250" marR="95250" marT="57150" marB="57150" anchor="ctr"/>
+                </a:tc>
+                <a:tc>
+                  <a:txBody>
+                    <a:bodyPr/>
+                    <a:lstStyle/>
+                    <a:p>
+                      <a:pPr>
+                        <a:buNone/>
+                      </a:pPr>
+                      <a:r>
+                        <a:rPr lang="en-SA">
+                          <a:effectLst/>
+                        </a:rPr>
+                        <a:t>84%</a:t>
+                      </a:r>
+                    </a:p>
+                  </a:txBody>
+                  <a:tcPr marL="95250" marR="95250" marT="57150" marB="57150" anchor="ctr"/>
+                </a:tc>
+                <a:extLst>
+                  <a:ext uri="{0D108BD9-81ED-4DB2-BD59-A6C34878D82A}">
+                    <a16:rowId xmlns:a16="http://schemas.microsoft.com/office/drawing/2014/main" val="3918212896"/>
+                  </a:ext>
+                </a:extLst>
+              </a:tr>
+              <a:tr h="0">
+                <a:tc>
+                  <a:txBody>
+                    <a:bodyPr/>
+                    <a:lstStyle/>
+                    <a:p>
+                      <a:pPr>
+                        <a:buNone/>
+                      </a:pPr>
+                      <a:r>
+                        <a:rPr lang="en-SA">
+                          <a:effectLst/>
+                        </a:rPr>
+                        <a:t>Random Forest</a:t>
+                      </a:r>
+                    </a:p>
+                  </a:txBody>
+                  <a:tcPr marL="95250" marR="95250" marT="57150" marB="57150" anchor="ctr"/>
+                </a:tc>
+                <a:tc>
+                  <a:txBody>
+                    <a:bodyPr/>
+                    <a:lstStyle/>
+                    <a:p>
+                      <a:pPr>
+                        <a:buNone/>
+                      </a:pPr>
+                      <a:r>
+                        <a:rPr lang="en-SA" dirty="0">
+                          <a:effectLst/>
+                        </a:rPr>
+                        <a:t>0.5000 (default)</a:t>
+                      </a:r>
+                    </a:p>
+                  </a:txBody>
+                  <a:tcPr marL="95250" marR="95250" marT="57150" marB="57150" anchor="ctr"/>
+                </a:tc>
+                <a:tc>
+                  <a:txBody>
+                    <a:bodyPr/>
+                    <a:lstStyle/>
+                    <a:p>
+                      <a:pPr>
+                        <a:buNone/>
+                      </a:pPr>
+                      <a:r>
+                        <a:rPr lang="en-SA">
+                          <a:effectLst/>
+                        </a:rPr>
+                        <a:t>46%</a:t>
+                      </a:r>
+                    </a:p>
+                  </a:txBody>
+                  <a:tcPr marL="95250" marR="95250" marT="57150" marB="57150" anchor="ctr"/>
+                </a:tc>
+                <a:tc>
+                  <a:txBody>
+                    <a:bodyPr/>
+                    <a:lstStyle/>
+                    <a:p>
+                      <a:pPr>
+                        <a:buNone/>
+                      </a:pPr>
+                      <a:r>
+                        <a:rPr lang="en-SA">
+                          <a:effectLst/>
+                        </a:rPr>
+                        <a:t>59%</a:t>
+                      </a:r>
+                    </a:p>
+                  </a:txBody>
+                  <a:tcPr marL="95250" marR="95250" marT="57150" marB="57150" anchor="ctr"/>
+                </a:tc>
+                <a:tc>
+                  <a:txBody>
+                    <a:bodyPr/>
+                    <a:lstStyle/>
+                    <a:p>
+                      <a:pPr>
+                        <a:buNone/>
+                      </a:pPr>
+                      <a:r>
+                        <a:rPr lang="en-SA">
+                          <a:effectLst/>
+                        </a:rPr>
+                        <a:t>87%</a:t>
+                      </a:r>
+                    </a:p>
+                  </a:txBody>
+                  <a:tcPr marL="95250" marR="95250" marT="57150" marB="57150" anchor="ctr"/>
+                </a:tc>
+                <a:extLst>
+                  <a:ext uri="{0D108BD9-81ED-4DB2-BD59-A6C34878D82A}">
+                    <a16:rowId xmlns:a16="http://schemas.microsoft.com/office/drawing/2014/main" val="2572622624"/>
+                  </a:ext>
+                </a:extLst>
+              </a:tr>
+              <a:tr h="0">
+                <a:tc>
+                  <a:txBody>
+                    <a:bodyPr/>
+                    <a:lstStyle/>
+                    <a:p>
+                      <a:pPr>
+                        <a:buNone/>
+                      </a:pPr>
+                      <a:r>
+                        <a:rPr lang="en-SA">
+                          <a:effectLst/>
+                        </a:rPr>
+                        <a:t>Random Forest</a:t>
+                      </a:r>
+                    </a:p>
+                  </a:txBody>
+                  <a:tcPr marL="95250" marR="95250" marT="57150" marB="57150" anchor="ctr"/>
+                </a:tc>
+                <a:tc>
+                  <a:txBody>
+                    <a:bodyPr/>
+                    <a:lstStyle/>
+                    <a:p>
+                      <a:pPr>
+                        <a:buNone/>
+                      </a:pPr>
+                      <a:r>
+                        <a:rPr lang="en-SA">
+                          <a:effectLst/>
+                        </a:rPr>
+                        <a:t>0.1988 (best)</a:t>
+                      </a:r>
+                    </a:p>
+                  </a:txBody>
+                  <a:tcPr marL="95250" marR="95250" marT="57150" marB="57150" anchor="ctr"/>
+                </a:tc>
+                <a:tc>
+                  <a:txBody>
+                    <a:bodyPr/>
+                    <a:lstStyle/>
+                    <a:p>
+                      <a:pPr>
+                        <a:buNone/>
+                      </a:pPr>
+                      <a:r>
+                        <a:rPr lang="en-SA">
+                          <a:effectLst/>
+                        </a:rPr>
+                        <a:t>77%</a:t>
+                      </a:r>
+                    </a:p>
+                  </a:txBody>
+                  <a:tcPr marL="95250" marR="95250" marT="57150" marB="57150" anchor="ctr"/>
+                </a:tc>
+                <a:tc>
+                  <a:txBody>
+                    <a:bodyPr/>
+                    <a:lstStyle/>
+                    <a:p>
+                      <a:pPr>
+                        <a:buNone/>
+                      </a:pPr>
+                      <a:r>
+                        <a:rPr lang="en-SA">
+                          <a:effectLst/>
+                        </a:rPr>
+                        <a:t>58%</a:t>
+                      </a:r>
+                    </a:p>
+                  </a:txBody>
+                  <a:tcPr marL="95250" marR="95250" marT="57150" marB="57150" anchor="ctr"/>
+                </a:tc>
+                <a:tc>
+                  <a:txBody>
+                    <a:bodyPr/>
+                    <a:lstStyle/>
+                    <a:p>
+                      <a:pPr>
+                        <a:buNone/>
+                      </a:pPr>
+                      <a:r>
+                        <a:rPr lang="en-SA" dirty="0">
+                          <a:effectLst/>
+                        </a:rPr>
+                        <a:t>78%</a:t>
+                      </a:r>
+                    </a:p>
+                  </a:txBody>
+                  <a:tcPr marL="95250" marR="95250" marT="57150" marB="57150" anchor="ctr"/>
+                </a:tc>
+                <a:extLst>
+                  <a:ext uri="{0D108BD9-81ED-4DB2-BD59-A6C34878D82A}">
+                    <a16:rowId xmlns:a16="http://schemas.microsoft.com/office/drawing/2014/main" val="2043810031"/>
+                  </a:ext>
+                </a:extLst>
+              </a:tr>
+            </a:tbl>
+          </a:graphicData>
+        </a:graphic>
+      </p:graphicFrame>
+    </p:spTree>
+    <p:extLst>
+      <p:ext uri="{BB962C8B-B14F-4D97-AF65-F5344CB8AC3E}">
+        <p14:creationId xmlns:p14="http://schemas.microsoft.com/office/powerpoint/2010/main" val="913672366"/>
+      </p:ext>
+    </p:extLst>
+  </p:cSld>
+  <p:clrMapOvr>
+    <a:masterClrMapping/>
+  </p:clrMapOvr>
+</p:sld>
+</file>
+
+<file path=ppt/slides/slide11.xml><?xml version="1.0" encoding="utf-8"?>
+<p:sld xmlns:a="http://schemas.openxmlformats.org/drawingml/2006/main" xmlns:r="http://schemas.openxmlformats.org/officeDocument/2006/relationships" xmlns:p="http://schemas.openxmlformats.org/presentationml/2006/main">
+  <p:cSld>
+    <p:bg>
+      <p:bgPr>
+        <a:solidFill>
+          <a:srgbClr val="FFFFFF"/>
+        </a:solidFill>
+        <a:effectLst/>
+      </p:bgPr>
+    </p:bg>
+    <p:spTree>
+      <p:nvGrpSpPr>
+        <p:cNvPr id="1" name=""/>
+        <p:cNvGrpSpPr/>
+        <p:nvPr/>
+      </p:nvGrpSpPr>
+      <p:grpSpPr>
+        <a:xfrm>
+          <a:off x="0" y="0"/>
+          <a:ext cx="0" cy="0"/>
+          <a:chOff x="0" y="0"/>
+          <a:chExt cx="0" cy="0"/>
+        </a:xfrm>
+      </p:grpSpPr>
+      <p:sp>
+        <p:nvSpPr>
+          <p:cNvPr id="14" name="Rectangle 13">
+            <a:extLst>
+              <a:ext uri="{FF2B5EF4-FFF2-40B4-BE49-F238E27FC236}">
+                <a16:creationId xmlns:a16="http://schemas.microsoft.com/office/drawing/2014/main" id="{C7286A33-6FFE-4CB3-8FCE-1840E7827124}"/>
+              </a:ext>
+            </a:extLst>
+          </p:cNvPr>
+          <p:cNvSpPr>
+            <a:spLocks noGrp="1"/>
+          </p:cNvSpPr>
+          <p:nvPr/>
+        </p:nvSpPr>
+        <p:spPr>
+          <a:xfrm>
+            <a:off x="400050" y="342900"/>
+            <a:ext cx="10668000" cy="914400"/>
+          </a:xfrm>
+          <a:prstGeom prst="rect">
+            <a:avLst/>
+          </a:prstGeom>
+          <a:noFill/>
+          <a:ln w="0">
+            <a:noFill/>
+            <a:prstDash val="solid"/>
+          </a:ln>
+        </p:spPr>
+        <p:txBody>
+          <a:bodyPr anchor="t"/>
+          <a:lstStyle/>
+          <a:p>
+            <a:pPr algn="l">
+              <a:defRPr sz="2925" b="1">
+                <a:solidFill>
+                  <a:srgbClr val="000000"/>
+                </a:solidFill>
+                <a:latin typeface="Helvetica Neue"/>
+                <a:ea typeface="Helvetica Neue"/>
+                <a:cs typeface="Helvetica Neue"/>
+              </a:defRPr>
+            </a:pPr>
+            <a:r>
+              <a:rPr sz="2925" b="1">
+                <a:solidFill>
+                  <a:srgbClr val="000000"/>
+                </a:solidFill>
+                <a:latin typeface="Helvetica Neue"/>
+                <a:ea typeface="Helvetica Neue"/>
+                <a:cs typeface="Helvetica Neue"/>
+              </a:rPr>
+              <a:t>The completed LLM layer converts model output into retention advice</a:t>
+            </a:r>
+          </a:p>
+        </p:txBody>
+      </p:sp>
+      <p:sp>
+        <p:nvSpPr>
+          <p:cNvPr id="2" name="Rectangle 1">
+            <a:extLst>
+              <a:ext uri="{FF2B5EF4-FFF2-40B4-BE49-F238E27FC236}">
+                <a16:creationId xmlns:a16="http://schemas.microsoft.com/office/drawing/2014/main" id="{FC7AFCFB-8B44-43E4-A05F-FAFFBE119917}"/>
+              </a:ext>
+            </a:extLst>
+          </p:cNvPr>
+          <p:cNvSpPr>
+            <a:spLocks noGrp="1"/>
+          </p:cNvSpPr>
+          <p:nvPr/>
+        </p:nvSpPr>
+        <p:spPr>
+          <a:xfrm>
+            <a:off x="400050" y="1281112"/>
+            <a:ext cx="9525000" cy="381000"/>
+          </a:xfrm>
+          <a:prstGeom prst="rect">
+            <a:avLst/>
+          </a:prstGeom>
+          <a:noFill/>
+          <a:ln w="0">
+            <a:noFill/>
+            <a:prstDash val="solid"/>
+          </a:ln>
+        </p:spPr>
+        <p:txBody>
+          <a:bodyPr anchor="t"/>
+          <a:lstStyle/>
+          <a:p>
+            <a:pPr algn="l">
+              <a:defRPr sz="1650" b="0">
+                <a:solidFill>
+                  <a:srgbClr val="4B5563"/>
+                </a:solidFill>
+                <a:latin typeface="Helvetica Neue"/>
+                <a:ea typeface="Helvetica Neue"/>
+                <a:cs typeface="Helvetica Neue"/>
+              </a:defRPr>
+            </a:pPr>
+            <a:r>
+              <a:rPr sz="1650" b="0" dirty="0">
                 <a:solidFill>
                   <a:srgbClr val="4B5563"/>
                 </a:solidFill>
@@ -4379,7 +5514,7 @@
 </p:sld>
 </file>
 
-<file path=ppt/slides/slide11.xml><?xml version="1.0" encoding="utf-8"?>
+<file path=ppt/slides/slide12.xml><?xml version="1.0" encoding="utf-8"?>
 <p:sld xmlns:a="http://schemas.openxmlformats.org/drawingml/2006/main" xmlns:r="http://schemas.openxmlformats.org/officeDocument/2006/relationships" xmlns:p="http://schemas.openxmlformats.org/presentationml/2006/main">
   <p:cSld>
     <p:bg>
@@ -5692,7 +6827,7 @@
               </a:defRPr>
             </a:pPr>
             <a:r>
-              <a:rPr sz="2925" b="1">
+              <a:rPr sz="2400" b="1" dirty="0">
                 <a:solidFill>
                   <a:srgbClr val="000000"/>
                 </a:solidFill>
@@ -5721,7 +6856,7 @@
         </p:nvSpPr>
         <p:spPr>
           <a:xfrm>
-            <a:off x="400050" y="1123950"/>
+            <a:off x="400050" y="982980"/>
             <a:ext cx="8572500" cy="381000"/>
           </a:xfrm>
           <a:prstGeom prst="rect">
@@ -5748,7 +6883,7 @@
               </a:defRPr>
             </a:pPr>
             <a:r>
-              <a:rPr sz="1650" b="0">
+              <a:rPr sz="1650" b="0" dirty="0">
                 <a:solidFill>
                   <a:srgbClr val="4B5563"/>
                 </a:solidFill>
@@ -6276,7 +7411,7 @@
                     <a:lstStyle/>
                     <a:p>
                       <a:r>
-                        <a:rPr b="1">
+                        <a:rPr b="1" dirty="0">
                           <a:solidFill>
                             <a:srgbClr val="FFFFFF"/>
                           </a:solidFill>
@@ -6430,8 +7565,18 @@
                     <a:lstStyle/>
                     <a:p>
                       <a:r>
-                        <a:t>NumOfProducts, HasCrCard</a:t>
+                        <a:rPr dirty="0" err="1"/>
+                        <a:t>NumOfProducts</a:t>
                       </a:r>
+                      <a:r>
+                        <a:rPr dirty="0"/>
+                        <a:t>, </a:t>
+                      </a:r>
+                      <a:r>
+                        <a:rPr dirty="0" err="1"/>
+                        <a:t>HasCrCard</a:t>
+                      </a:r>
+                      <a:endParaRPr dirty="0"/>
                     </a:p>
                   </a:txBody>
                   <a:tcPr/>
@@ -8965,7 +10110,7 @@
         </p:nvSpPr>
         <p:spPr>
           <a:xfrm>
-            <a:off x="400050" y="1143000"/>
+            <a:off x="400050" y="1333500"/>
             <a:ext cx="10096500" cy="666750"/>
           </a:xfrm>
           <a:prstGeom prst="rect">
@@ -8992,7 +10137,7 @@
               </a:defRPr>
             </a:pPr>
             <a:r>
-              <a:rPr sz="1650" b="0">
+              <a:rPr sz="1650" b="0" dirty="0">
                 <a:solidFill>
                   <a:srgbClr val="4B5563"/>
                 </a:solidFill>
@@ -9352,7 +10497,7 @@
               </a:defRPr>
             </a:pPr>
             <a:r>
-              <a:rPr sz="3375" b="1">
+              <a:rPr sz="3375" b="1" dirty="0">
                 <a:solidFill>
                   <a:srgbClr val="000000"/>
                 </a:solidFill>
@@ -9560,6 +10705,17 @@
               </a:defRPr>
             </a:pPr>
             <a:r>
+              <a:rPr lang="en-US" sz="3375" b="1" dirty="0">
+                <a:solidFill>
+                  <a:srgbClr val="3D8DFF"/>
+                </a:solidFill>
+                <a:latin typeface="Helvetica Neue"/>
+                <a:ea typeface="Helvetica Neue"/>
+                <a:cs typeface="Helvetica Neue"/>
+              </a:rPr>
+              <a:t>64</a:t>
+            </a:r>
+            <a:r>
               <a:rPr sz="3375" b="1" dirty="0">
                 <a:solidFill>
                   <a:srgbClr val="3D8DFF"/>
@@ -9568,7 +10724,7 @@
                 <a:ea typeface="Helvetica Neue"/>
                 <a:cs typeface="Helvetica Neue"/>
               </a:rPr>
-              <a:t>19.6 s</a:t>
+              <a:t> s</a:t>
             </a:r>
           </a:p>
         </p:txBody>
@@ -9835,22 +10991,6 @@
           </a:p>
         </p:txBody>
       </p:sp>
-      <p:graphicFrame>
-        <p:nvGraphicFramePr>
-          <p:cNvPr id="11" name="Chart"/>
-          <p:cNvGraphicFramePr/>
-          <p:nvPr/>
-        </p:nvGraphicFramePr>
-        <p:xfrm>
-          <a:off x="523875" y="1428750"/>
-          <a:ext cx="7286625" cy="4095750"/>
-        </p:xfrm>
-        <a:graphic>
-          <a:graphicData uri="http://schemas.openxmlformats.org/drawingml/2006/chart">
-            <c:chart xmlns:c="http://schemas.openxmlformats.org/drawingml/2006/chart" xmlns:r="http://schemas.openxmlformats.org/officeDocument/2006/relationships" r:id="rId3"/>
-          </a:graphicData>
-        </a:graphic>
-      </p:graphicFrame>
       <p:sp>
         <p:nvSpPr>
           <p:cNvPr id="3" name="Rectangle 2">
@@ -10209,6 +11349,36 @@
           </a:p>
         </p:txBody>
       </p:sp>
+      <p:pic>
+        <p:nvPicPr>
+          <p:cNvPr id="2" name="Picture 1">
+            <a:extLst>
+              <a:ext uri="{FF2B5EF4-FFF2-40B4-BE49-F238E27FC236}">
+                <a16:creationId xmlns:a16="http://schemas.microsoft.com/office/drawing/2014/main" id="{C677A9EB-D348-A9BB-8578-F255BBC8FC44}"/>
+              </a:ext>
+            </a:extLst>
+          </p:cNvPr>
+          <p:cNvPicPr>
+            <a:picLocks noChangeAspect="1"/>
+          </p:cNvPicPr>
+          <p:nvPr/>
+        </p:nvPicPr>
+        <p:blipFill>
+          <a:blip r:embed="rId3"/>
+          <a:stretch>
+            <a:fillRect/>
+          </a:stretch>
+        </p:blipFill>
+        <p:spPr>
+          <a:xfrm>
+            <a:off x="253365" y="1257300"/>
+            <a:ext cx="7890510" cy="4777740"/>
+          </a:xfrm>
+          <a:prstGeom prst="rect">
+            <a:avLst/>
+          </a:prstGeom>
+        </p:spPr>
+      </p:pic>
     </p:spTree>
     <p:extLst>
       <p:ext uri="{BB962C8B-B14F-4D97-AF65-F5344CB8AC3E}">
@@ -10235,7 +11405,13 @@
     </p:bg>
     <p:spTree>
       <p:nvGrpSpPr>
-        <p:cNvPr id="1" name=""/>
+        <p:cNvPr id="1" name="">
+          <a:extLst>
+            <a:ext uri="{FF2B5EF4-FFF2-40B4-BE49-F238E27FC236}">
+              <a16:creationId xmlns:a16="http://schemas.microsoft.com/office/drawing/2014/main" id="{6D953A5F-2800-78A5-7B2E-E2C90EE9133F}"/>
+            </a:ext>
+          </a:extLst>
+        </p:cNvPr>
         <p:cNvGrpSpPr/>
         <p:nvPr/>
       </p:nvGrpSpPr>
@@ -10249,10 +11425,10 @@
       </p:grpSpPr>
       <p:sp>
         <p:nvSpPr>
-          <p:cNvPr id="11" name="Rectangle 10">
-            <a:extLst>
-              <a:ext uri="{FF2B5EF4-FFF2-40B4-BE49-F238E27FC236}">
-                <a16:creationId xmlns:a16="http://schemas.microsoft.com/office/drawing/2014/main" id="{1E5E42F8-1808-4B26-BB42-128259CA0B18}"/>
+          <p:cNvPr id="10" name="Rectangle 9">
+            <a:extLst>
+              <a:ext uri="{FF2B5EF4-FFF2-40B4-BE49-F238E27FC236}">
+                <a16:creationId xmlns:a16="http://schemas.microsoft.com/office/drawing/2014/main" id="{53A5AC2D-FD7E-4F7B-9327-8EC1B509955A}"/>
               </a:ext>
             </a:extLst>
           </p:cNvPr>
@@ -10298,29 +11474,67 @@
                 <a:ea typeface="Helvetica Neue"/>
                 <a:cs typeface="Helvetica Neue"/>
               </a:rPr>
-              <a:t>Threshold tuning changed which model looked most useful for retention</a:t>
+              <a:t>Validation results show the accuracy versus recall trade-off</a:t>
             </a:r>
           </a:p>
         </p:txBody>
       </p:sp>
       <p:sp>
         <p:nvSpPr>
-          <p:cNvPr id="2" name="Rectangle 1">
-            <a:extLst>
-              <a:ext uri="{FF2B5EF4-FFF2-40B4-BE49-F238E27FC236}">
-                <a16:creationId xmlns:a16="http://schemas.microsoft.com/office/drawing/2014/main" id="{4E398746-D9C5-4D24-82FD-AFC8235814B7}"/>
-              </a:ext>
-            </a:extLst>
-          </p:cNvPr>
-          <p:cNvSpPr>
-            <a:spLocks noGrp="1"/>
-          </p:cNvSpPr>
-          <p:nvPr/>
-        </p:nvSpPr>
-        <p:spPr>
-          <a:xfrm>
-            <a:off x="400050" y="1143000"/>
-            <a:ext cx="9525000" cy="381000"/>
+          <p:cNvPr id="3" name="Rectangle 2">
+            <a:extLst>
+              <a:ext uri="{FF2B5EF4-FFF2-40B4-BE49-F238E27FC236}">
+                <a16:creationId xmlns:a16="http://schemas.microsoft.com/office/drawing/2014/main" id="{2769B784-22EB-1AF0-A01A-25231D9FF9C9}"/>
+              </a:ext>
+            </a:extLst>
+          </p:cNvPr>
+          <p:cNvSpPr>
+            <a:spLocks noGrp="1"/>
+          </p:cNvSpPr>
+          <p:nvPr/>
+        </p:nvSpPr>
+        <p:spPr>
+          <a:xfrm>
+            <a:off x="8286750" y="1600200"/>
+            <a:ext cx="3143250" cy="1333500"/>
+          </a:xfrm>
+          <a:prstGeom prst="rect">
+            <a:avLst/>
+          </a:prstGeom>
+          <a:solidFill>
+            <a:srgbClr val="F2F2F2"/>
+          </a:solidFill>
+          <a:ln w="0">
+            <a:noFill/>
+            <a:prstDash val="solid"/>
+          </a:ln>
+        </p:spPr>
+        <p:txBody>
+          <a:bodyPr/>
+          <a:lstStyle/>
+          <a:p>
+            <a:endParaRPr lang="en-US"/>
+          </a:p>
+        </p:txBody>
+      </p:sp>
+      <p:sp>
+        <p:nvSpPr>
+          <p:cNvPr id="4" name="Rectangle 3">
+            <a:extLst>
+              <a:ext uri="{FF2B5EF4-FFF2-40B4-BE49-F238E27FC236}">
+                <a16:creationId xmlns:a16="http://schemas.microsoft.com/office/drawing/2014/main" id="{ECF4C9D4-A833-8B17-A6BB-DB0CC62C2F31}"/>
+              </a:ext>
+            </a:extLst>
+          </p:cNvPr>
+          <p:cNvSpPr>
+            <a:spLocks noGrp="1"/>
+          </p:cNvSpPr>
+          <p:nvPr/>
+        </p:nvSpPr>
+        <p:spPr>
+          <a:xfrm>
+            <a:off x="8572500" y="1866900"/>
+            <a:ext cx="2571750" cy="438150"/>
           </a:xfrm>
           <a:prstGeom prst="rect">
             <a:avLst/>
@@ -10335,10 +11549,10 @@
           <a:bodyPr anchor="t"/>
           <a:lstStyle/>
           <a:p>
-            <a:pPr algn="l">
-              <a:defRPr sz="1650" b="0">
-                <a:solidFill>
-                  <a:srgbClr val="4B5563"/>
+            <a:pPr algn="ctr">
+              <a:defRPr sz="2850" b="1">
+                <a:solidFill>
+                  <a:srgbClr val="000000"/>
                 </a:solidFill>
                 <a:latin typeface="Helvetica Neue"/>
                 <a:ea typeface="Helvetica Neue"/>
@@ -10346,579 +11560,93 @@
               </a:defRPr>
             </a:pPr>
             <a:r>
-              <a:rPr sz="1650" b="0">
+              <a:rPr sz="2850" b="1" dirty="0">
+                <a:solidFill>
+                  <a:srgbClr val="000000"/>
+                </a:solidFill>
+                <a:latin typeface="Helvetica Neue"/>
+                <a:ea typeface="Helvetica Neue"/>
+                <a:cs typeface="Helvetica Neue"/>
+              </a:rPr>
+              <a:t>86.9%</a:t>
+            </a:r>
+          </a:p>
+        </p:txBody>
+      </p:sp>
+      <p:sp>
+        <p:nvSpPr>
+          <p:cNvPr id="5" name="Rectangle 4">
+            <a:extLst>
+              <a:ext uri="{FF2B5EF4-FFF2-40B4-BE49-F238E27FC236}">
+                <a16:creationId xmlns:a16="http://schemas.microsoft.com/office/drawing/2014/main" id="{BBF38013-ADBF-4E79-49D0-D9C063DBEAE0}"/>
+              </a:ext>
+            </a:extLst>
+          </p:cNvPr>
+          <p:cNvSpPr>
+            <a:spLocks noGrp="1"/>
+          </p:cNvSpPr>
+          <p:nvPr/>
+        </p:nvSpPr>
+        <p:spPr>
+          <a:xfrm>
+            <a:off x="8572500" y="2343150"/>
+            <a:ext cx="2571750" cy="304800"/>
+          </a:xfrm>
+          <a:prstGeom prst="rect">
+            <a:avLst/>
+          </a:prstGeom>
+          <a:noFill/>
+          <a:ln w="0">
+            <a:noFill/>
+            <a:prstDash val="solid"/>
+          </a:ln>
+        </p:spPr>
+        <p:txBody>
+          <a:bodyPr anchor="t"/>
+          <a:lstStyle/>
+          <a:p>
+            <a:pPr algn="ctr">
+              <a:defRPr sz="1200" b="0">
                 <a:solidFill>
                   <a:srgbClr val="4B5563"/>
                 </a:solidFill>
                 <a:latin typeface="Helvetica Neue"/>
                 <a:ea typeface="Helvetica Neue"/>
                 <a:cs typeface="Helvetica Neue"/>
+              </a:defRPr>
+            </a:pPr>
+            <a:r>
+              <a:rPr sz="1200" b="0">
+                <a:solidFill>
+                  <a:srgbClr val="4B5563"/>
+                </a:solidFill>
+                <a:latin typeface="Helvetica Neue"/>
+                <a:ea typeface="Helvetica Neue"/>
+                <a:cs typeface="Helvetica Neue"/>
               </a:rPr>
-              <a:t>For retention, catching churners can matter more than preserving the highest overall accuracy.</a:t>
+              <a:t>highest validation accuracy: Random Forest</a:t>
             </a:r>
           </a:p>
         </p:txBody>
       </p:sp>
-      <p:graphicFrame>
-        <p:nvGraphicFramePr>
-          <p:cNvPr id="13" name="Table 12"/>
-          <p:cNvGraphicFramePr/>
-          <p:nvPr/>
-        </p:nvGraphicFramePr>
-        <p:xfrm>
-          <a:off x="400050" y="1857375"/>
-          <a:ext cx="7048500" cy="3700463"/>
-        </p:xfrm>
-        <a:graphic>
-          <a:graphicData uri="http://schemas.openxmlformats.org/drawingml/2006/table">
-            <a:tbl>
-              <a:tblPr firstRow="1" bandRow="1"/>
-              <a:tblGrid>
-                <a:gridCol w="1409700">
-                  <a:extLst>
-                    <a:ext uri="{9D8B030D-6E8A-4147-A177-3AD203B41FA5}">
-                      <a16:colId xmlns:a16="http://schemas.microsoft.com/office/drawing/2014/main" val="20000"/>
-                    </a:ext>
-                  </a:extLst>
-                </a:gridCol>
-                <a:gridCol w="1409700">
-                  <a:extLst>
-                    <a:ext uri="{9D8B030D-6E8A-4147-A177-3AD203B41FA5}">
-                      <a16:colId xmlns:a16="http://schemas.microsoft.com/office/drawing/2014/main" val="20001"/>
-                    </a:ext>
-                  </a:extLst>
-                </a:gridCol>
-                <a:gridCol w="1409700">
-                  <a:extLst>
-                    <a:ext uri="{9D8B030D-6E8A-4147-A177-3AD203B41FA5}">
-                      <a16:colId xmlns:a16="http://schemas.microsoft.com/office/drawing/2014/main" val="20002"/>
-                    </a:ext>
-                  </a:extLst>
-                </a:gridCol>
-                <a:gridCol w="1409700">
-                  <a:extLst>
-                    <a:ext uri="{9D8B030D-6E8A-4147-A177-3AD203B41FA5}">
-                      <a16:colId xmlns:a16="http://schemas.microsoft.com/office/drawing/2014/main" val="20003"/>
-                    </a:ext>
-                  </a:extLst>
-                </a:gridCol>
-                <a:gridCol w="1409700">
-                  <a:extLst>
-                    <a:ext uri="{9D8B030D-6E8A-4147-A177-3AD203B41FA5}">
-                      <a16:colId xmlns:a16="http://schemas.microsoft.com/office/drawing/2014/main" val="20004"/>
-                    </a:ext>
-                  </a:extLst>
-                </a:gridCol>
-              </a:tblGrid>
-              <a:tr h="500063">
-                <a:tc>
-                  <a:txBody>
-                    <a:bodyPr/>
-                    <a:lstStyle/>
-                    <a:p>
-                      <a:r>
-                        <a:rPr>
-                          <a:solidFill>
-                            <a:srgbClr val="FFFFFF"/>
-                          </a:solidFill>
-                        </a:rPr>
-                        <a:t>Model</a:t>
-                      </a:r>
-                    </a:p>
-                  </a:txBody>
-                  <a:tcPr>
-                    <a:solidFill>
-                      <a:srgbClr val="000000"/>
-                    </a:solidFill>
-                  </a:tcPr>
-                </a:tc>
-                <a:tc>
-                  <a:txBody>
-                    <a:bodyPr/>
-                    <a:lstStyle/>
-                    <a:p>
-                      <a:r>
-                        <a:rPr>
-                          <a:solidFill>
-                            <a:srgbClr val="FFFFFF"/>
-                          </a:solidFill>
-                        </a:rPr>
-                        <a:t>Threshold</a:t>
-                      </a:r>
-                    </a:p>
-                  </a:txBody>
-                  <a:tcPr>
-                    <a:solidFill>
-                      <a:srgbClr val="000000"/>
-                    </a:solidFill>
-                  </a:tcPr>
-                </a:tc>
-                <a:tc>
-                  <a:txBody>
-                    <a:bodyPr/>
-                    <a:lstStyle/>
-                    <a:p>
-                      <a:r>
-                        <a:rPr>
-                          <a:solidFill>
-                            <a:srgbClr val="FFFFFF"/>
-                          </a:solidFill>
-                        </a:rPr>
-                        <a:t>Recall</a:t>
-                      </a:r>
-                    </a:p>
-                  </a:txBody>
-                  <a:tcPr>
-                    <a:solidFill>
-                      <a:srgbClr val="000000"/>
-                    </a:solidFill>
-                  </a:tcPr>
-                </a:tc>
-                <a:tc>
-                  <a:txBody>
-                    <a:bodyPr/>
-                    <a:lstStyle/>
-                    <a:p>
-                      <a:r>
-                        <a:rPr>
-                          <a:solidFill>
-                            <a:srgbClr val="FFFFFF"/>
-                          </a:solidFill>
-                        </a:rPr>
-                        <a:t>F1</a:t>
-                      </a:r>
-                    </a:p>
-                  </a:txBody>
-                  <a:tcPr>
-                    <a:solidFill>
-                      <a:srgbClr val="000000"/>
-                    </a:solidFill>
-                  </a:tcPr>
-                </a:tc>
-                <a:tc>
-                  <a:txBody>
-                    <a:bodyPr/>
-                    <a:lstStyle/>
-                    <a:p>
-                      <a:r>
-                        <a:rPr>
-                          <a:solidFill>
-                            <a:srgbClr val="FFFFFF"/>
-                          </a:solidFill>
-                        </a:rPr>
-                        <a:t>Accuracy</a:t>
-                      </a:r>
-                    </a:p>
-                  </a:txBody>
-                  <a:tcPr>
-                    <a:solidFill>
-                      <a:srgbClr val="000000"/>
-                    </a:solidFill>
-                  </a:tcPr>
-                </a:tc>
-                <a:extLst>
-                  <a:ext uri="{0D108BD9-81ED-4DB2-BD59-A6C34878D82A}">
-                    <a16:rowId xmlns:a16="http://schemas.microsoft.com/office/drawing/2014/main" val="10000"/>
-                  </a:ext>
-                </a:extLst>
-              </a:tr>
-              <a:tr h="500063">
-                <a:tc>
-                  <a:txBody>
-                    <a:bodyPr/>
-                    <a:lstStyle/>
-                    <a:p>
-                      <a:r>
-                        <a:t>Decision Tree</a:t>
-                      </a:r>
-                    </a:p>
-                  </a:txBody>
-                  <a:tcPr/>
-                </a:tc>
-                <a:tc>
-                  <a:txBody>
-                    <a:bodyPr/>
-                    <a:lstStyle/>
-                    <a:p>
-                      <a:r>
-                        <a:t>0.5000</a:t>
-                      </a:r>
-                    </a:p>
-                  </a:txBody>
-                  <a:tcPr/>
-                </a:tc>
-                <a:tc>
-                  <a:txBody>
-                    <a:bodyPr/>
-                    <a:lstStyle/>
-                    <a:p>
-                      <a:r>
-                        <a:t>40%</a:t>
-                      </a:r>
-                    </a:p>
-                  </a:txBody>
-                  <a:tcPr/>
-                </a:tc>
-                <a:tc>
-                  <a:txBody>
-                    <a:bodyPr/>
-                    <a:lstStyle/>
-                    <a:p>
-                      <a:r>
-                        <a:t>55%</a:t>
-                      </a:r>
-                    </a:p>
-                  </a:txBody>
-                  <a:tcPr/>
-                </a:tc>
-                <a:tc>
-                  <a:txBody>
-                    <a:bodyPr/>
-                    <a:lstStyle/>
-                    <a:p>
-                      <a:r>
-                        <a:t>87%</a:t>
-                      </a:r>
-                    </a:p>
-                  </a:txBody>
-                  <a:tcPr/>
-                </a:tc>
-                <a:extLst>
-                  <a:ext uri="{0D108BD9-81ED-4DB2-BD59-A6C34878D82A}">
-                    <a16:rowId xmlns:a16="http://schemas.microsoft.com/office/drawing/2014/main" val="10001"/>
-                  </a:ext>
-                </a:extLst>
-              </a:tr>
-              <a:tr h="500063">
-                <a:tc>
-                  <a:txBody>
-                    <a:bodyPr/>
-                    <a:lstStyle/>
-                    <a:p>
-                      <a:r>
-                        <a:t>Decision Tree</a:t>
-                      </a:r>
-                    </a:p>
-                  </a:txBody>
-                  <a:tcPr>
-                    <a:solidFill>
-                      <a:srgbClr val="EAF5FB"/>
-                    </a:solidFill>
-                  </a:tcPr>
-                </a:tc>
-                <a:tc>
-                  <a:txBody>
-                    <a:bodyPr/>
-                    <a:lstStyle/>
-                    <a:p>
-                      <a:r>
-                        <a:t>0.3077</a:t>
-                      </a:r>
-                    </a:p>
-                  </a:txBody>
-                  <a:tcPr>
-                    <a:solidFill>
-                      <a:srgbClr val="EAF5FB"/>
-                    </a:solidFill>
-                  </a:tcPr>
-                </a:tc>
-                <a:tc>
-                  <a:txBody>
-                    <a:bodyPr/>
-                    <a:lstStyle/>
-                    <a:p>
-                      <a:r>
-                        <a:t>67%</a:t>
-                      </a:r>
-                    </a:p>
-                  </a:txBody>
-                  <a:tcPr>
-                    <a:solidFill>
-                      <a:srgbClr val="EAF5FB"/>
-                    </a:solidFill>
-                  </a:tcPr>
-                </a:tc>
-                <a:tc>
-                  <a:txBody>
-                    <a:bodyPr/>
-                    <a:lstStyle/>
-                    <a:p>
-                      <a:r>
-                        <a:t>63%</a:t>
-                      </a:r>
-                    </a:p>
-                  </a:txBody>
-                  <a:tcPr>
-                    <a:solidFill>
-                      <a:srgbClr val="EAF5FB"/>
-                    </a:solidFill>
-                  </a:tcPr>
-                </a:tc>
-                <a:tc>
-                  <a:txBody>
-                    <a:bodyPr/>
-                    <a:lstStyle/>
-                    <a:p>
-                      <a:r>
-                        <a:t>84%</a:t>
-                      </a:r>
-                    </a:p>
-                  </a:txBody>
-                  <a:tcPr>
-                    <a:solidFill>
-                      <a:srgbClr val="EAF5FB"/>
-                    </a:solidFill>
-                  </a:tcPr>
-                </a:tc>
-                <a:extLst>
-                  <a:ext uri="{0D108BD9-81ED-4DB2-BD59-A6C34878D82A}">
-                    <a16:rowId xmlns:a16="http://schemas.microsoft.com/office/drawing/2014/main" val="10002"/>
-                  </a:ext>
-                </a:extLst>
-              </a:tr>
-              <a:tr h="500063">
-                <a:tc>
-                  <a:txBody>
-                    <a:bodyPr/>
-                    <a:lstStyle/>
-                    <a:p>
-                      <a:r>
-                        <a:t>Random Forest</a:t>
-                      </a:r>
-                    </a:p>
-                  </a:txBody>
-                  <a:tcPr/>
-                </a:tc>
-                <a:tc>
-                  <a:txBody>
-                    <a:bodyPr/>
-                    <a:lstStyle/>
-                    <a:p>
-                      <a:r>
-                        <a:t>0.5000</a:t>
-                      </a:r>
-                    </a:p>
-                  </a:txBody>
-                  <a:tcPr/>
-                </a:tc>
-                <a:tc>
-                  <a:txBody>
-                    <a:bodyPr/>
-                    <a:lstStyle/>
-                    <a:p>
-                      <a:r>
-                        <a:t>46%</a:t>
-                      </a:r>
-                    </a:p>
-                  </a:txBody>
-                  <a:tcPr/>
-                </a:tc>
-                <a:tc>
-                  <a:txBody>
-                    <a:bodyPr/>
-                    <a:lstStyle/>
-                    <a:p>
-                      <a:r>
-                        <a:t>59%</a:t>
-                      </a:r>
-                    </a:p>
-                  </a:txBody>
-                  <a:tcPr/>
-                </a:tc>
-                <a:tc>
-                  <a:txBody>
-                    <a:bodyPr/>
-                    <a:lstStyle/>
-                    <a:p>
-                      <a:r>
-                        <a:t>87%</a:t>
-                      </a:r>
-                    </a:p>
-                  </a:txBody>
-                  <a:tcPr/>
-                </a:tc>
-                <a:extLst>
-                  <a:ext uri="{0D108BD9-81ED-4DB2-BD59-A6C34878D82A}">
-                    <a16:rowId xmlns:a16="http://schemas.microsoft.com/office/drawing/2014/main" val="10003"/>
-                  </a:ext>
-                </a:extLst>
-              </a:tr>
-              <a:tr h="500063">
-                <a:tc>
-                  <a:txBody>
-                    <a:bodyPr/>
-                    <a:lstStyle/>
-                    <a:p>
-                      <a:r>
-                        <a:t>Random Forest</a:t>
-                      </a:r>
-                    </a:p>
-                  </a:txBody>
-                  <a:tcPr>
-                    <a:solidFill>
-                      <a:srgbClr val="EAF5FB"/>
-                    </a:solidFill>
-                  </a:tcPr>
-                </a:tc>
-                <a:tc>
-                  <a:txBody>
-                    <a:bodyPr/>
-                    <a:lstStyle/>
-                    <a:p>
-                      <a:r>
-                        <a:t>0.1985</a:t>
-                      </a:r>
-                    </a:p>
-                  </a:txBody>
-                  <a:tcPr>
-                    <a:solidFill>
-                      <a:srgbClr val="EAF5FB"/>
-                    </a:solidFill>
-                  </a:tcPr>
-                </a:tc>
-                <a:tc>
-                  <a:txBody>
-                    <a:bodyPr/>
-                    <a:lstStyle/>
-                    <a:p>
-                      <a:r>
-                        <a:t>77%</a:t>
-                      </a:r>
-                    </a:p>
-                  </a:txBody>
-                  <a:tcPr>
-                    <a:solidFill>
-                      <a:srgbClr val="EAF5FB"/>
-                    </a:solidFill>
-                  </a:tcPr>
-                </a:tc>
-                <a:tc>
-                  <a:txBody>
-                    <a:bodyPr/>
-                    <a:lstStyle/>
-                    <a:p>
-                      <a:r>
-                        <a:t>58%</a:t>
-                      </a:r>
-                    </a:p>
-                  </a:txBody>
-                  <a:tcPr>
-                    <a:solidFill>
-                      <a:srgbClr val="EAF5FB"/>
-                    </a:solidFill>
-                  </a:tcPr>
-                </a:tc>
-                <a:tc>
-                  <a:txBody>
-                    <a:bodyPr/>
-                    <a:lstStyle/>
-                    <a:p>
-                      <a:r>
-                        <a:t>78%</a:t>
-                      </a:r>
-                    </a:p>
-                  </a:txBody>
-                  <a:tcPr>
-                    <a:solidFill>
-                      <a:srgbClr val="EAF5FB"/>
-                    </a:solidFill>
-                  </a:tcPr>
-                </a:tc>
-                <a:extLst>
-                  <a:ext uri="{0D108BD9-81ED-4DB2-BD59-A6C34878D82A}">
-                    <a16:rowId xmlns:a16="http://schemas.microsoft.com/office/drawing/2014/main" val="10004"/>
-                  </a:ext>
-                </a:extLst>
-              </a:tr>
-              <a:tr h="500063">
-                <a:tc>
-                  <a:txBody>
-                    <a:bodyPr/>
-                    <a:lstStyle/>
-                    <a:p>
-                      <a:r>
-                        <a:t>LogReg / SVM</a:t>
-                      </a:r>
-                    </a:p>
-                  </a:txBody>
-                  <a:tcPr/>
-                </a:tc>
-                <a:tc>
-                  <a:txBody>
-                    <a:bodyPr/>
-                    <a:lstStyle/>
-                    <a:p>
-                      <a:r>
-                        <a:t>default/best</a:t>
-                      </a:r>
-                    </a:p>
-                  </a:txBody>
-                  <a:tcPr/>
-                </a:tc>
-                <a:tc>
-                  <a:txBody>
-                    <a:bodyPr/>
-                    <a:lstStyle/>
-                    <a:p>
-                      <a:r>
-                        <a:t>75%</a:t>
-                      </a:r>
-                    </a:p>
-                  </a:txBody>
-                  <a:tcPr/>
-                </a:tc>
-                <a:tc>
-                  <a:txBody>
-                    <a:bodyPr/>
-                    <a:lstStyle/>
-                    <a:p>
-                      <a:r>
-                        <a:t>59%</a:t>
-                      </a:r>
-                    </a:p>
-                  </a:txBody>
-                  <a:tcPr/>
-                </a:tc>
-                <a:tc>
-                  <a:txBody>
-                    <a:bodyPr/>
-                    <a:lstStyle/>
-                    <a:p>
-                      <a:r>
-                        <a:t>79%</a:t>
-                      </a:r>
-                    </a:p>
-                  </a:txBody>
-                  <a:tcPr/>
-                </a:tc>
-                <a:extLst>
-                  <a:ext uri="{0D108BD9-81ED-4DB2-BD59-A6C34878D82A}">
-                    <a16:rowId xmlns:a16="http://schemas.microsoft.com/office/drawing/2014/main" val="10005"/>
-                  </a:ext>
-                </a:extLst>
-              </a:tr>
-            </a:tbl>
-          </a:graphicData>
-        </a:graphic>
-      </p:graphicFrame>
-      <p:sp>
-        <p:nvSpPr>
-          <p:cNvPr id="4" name="Rectangle 3">
-            <a:extLst>
-              <a:ext uri="{FF2B5EF4-FFF2-40B4-BE49-F238E27FC236}">
-                <a16:creationId xmlns:a16="http://schemas.microsoft.com/office/drawing/2014/main" id="{EA62756C-C961-4AC8-BD4F-784282E5766A}"/>
-              </a:ext>
-            </a:extLst>
-          </p:cNvPr>
-          <p:cNvSpPr>
-            <a:spLocks noGrp="1"/>
-          </p:cNvSpPr>
-          <p:nvPr/>
-        </p:nvSpPr>
-        <p:spPr>
-          <a:xfrm>
-            <a:off x="8096250" y="2000250"/>
-            <a:ext cx="3048000" cy="1428750"/>
+      <p:sp>
+        <p:nvSpPr>
+          <p:cNvPr id="6" name="Rectangle 5">
+            <a:extLst>
+              <a:ext uri="{FF2B5EF4-FFF2-40B4-BE49-F238E27FC236}">
+                <a16:creationId xmlns:a16="http://schemas.microsoft.com/office/drawing/2014/main" id="{DD050FC6-1B83-5E39-8C05-3F933F5649EC}"/>
+              </a:ext>
+            </a:extLst>
+          </p:cNvPr>
+          <p:cNvSpPr>
+            <a:spLocks noGrp="1"/>
+          </p:cNvSpPr>
+          <p:nvPr/>
+        </p:nvSpPr>
+        <p:spPr>
+          <a:xfrm>
+            <a:off x="8286750" y="3124200"/>
+            <a:ext cx="3143250" cy="1333500"/>
           </a:xfrm>
           <a:prstGeom prst="rect">
             <a:avLst/>
@@ -10943,22 +11671,22 @@
       </p:sp>
       <p:sp>
         <p:nvSpPr>
-          <p:cNvPr id="5" name="Rectangle 4">
-            <a:extLst>
-              <a:ext uri="{FF2B5EF4-FFF2-40B4-BE49-F238E27FC236}">
-                <a16:creationId xmlns:a16="http://schemas.microsoft.com/office/drawing/2014/main" id="{E77118AD-14F9-4732-8D37-58B860FE76E2}"/>
-              </a:ext>
-            </a:extLst>
-          </p:cNvPr>
-          <p:cNvSpPr>
-            <a:spLocks noGrp="1"/>
-          </p:cNvSpPr>
-          <p:nvPr/>
-        </p:nvSpPr>
-        <p:spPr>
-          <a:xfrm>
-            <a:off x="8382000" y="2247900"/>
-            <a:ext cx="2476500" cy="323850"/>
+          <p:cNvPr id="7" name="Rectangle 6">
+            <a:extLst>
+              <a:ext uri="{FF2B5EF4-FFF2-40B4-BE49-F238E27FC236}">
+                <a16:creationId xmlns:a16="http://schemas.microsoft.com/office/drawing/2014/main" id="{EDE02120-9FD5-8408-EF79-7E4078886AEF}"/>
+              </a:ext>
+            </a:extLst>
+          </p:cNvPr>
+          <p:cNvSpPr>
+            <a:spLocks noGrp="1"/>
+          </p:cNvSpPr>
+          <p:nvPr/>
+        </p:nvSpPr>
+        <p:spPr>
+          <a:xfrm>
+            <a:off x="8572500" y="3352800"/>
+            <a:ext cx="2571750" cy="323850"/>
           </a:xfrm>
           <a:prstGeom prst="rect">
             <a:avLst/>
@@ -10974,7 +11702,7 @@
           <a:lstStyle/>
           <a:p>
             <a:pPr algn="ctr">
-              <a:defRPr sz="1875" b="1">
+              <a:defRPr sz="2100" b="1">
                 <a:solidFill>
                   <a:srgbClr val="000000"/>
                 </a:solidFill>
@@ -10984,7 +11712,7 @@
               </a:defRPr>
             </a:pPr>
             <a:r>
-              <a:rPr sz="1875" b="1">
+              <a:rPr sz="2100" b="1">
                 <a:solidFill>
                   <a:srgbClr val="000000"/>
                 </a:solidFill>
@@ -10992,179 +11720,29 @@
                 <a:ea typeface="Helvetica Neue"/>
                 <a:cs typeface="Helvetica Neue"/>
               </a:rPr>
-              <a:t>Best balance</a:t>
+              <a:t>But</a:t>
             </a:r>
           </a:p>
         </p:txBody>
       </p:sp>
       <p:sp>
         <p:nvSpPr>
-          <p:cNvPr id="6" name="Rectangle 5">
-            <a:extLst>
-              <a:ext uri="{FF2B5EF4-FFF2-40B4-BE49-F238E27FC236}">
-                <a16:creationId xmlns:a16="http://schemas.microsoft.com/office/drawing/2014/main" id="{73278101-7D77-4E40-9556-7FEDA40C40FF}"/>
-              </a:ext>
-            </a:extLst>
-          </p:cNvPr>
-          <p:cNvSpPr>
-            <a:spLocks noGrp="1"/>
-          </p:cNvSpPr>
-          <p:nvPr/>
-        </p:nvSpPr>
-        <p:spPr>
-          <a:xfrm>
-            <a:off x="8382000" y="2647950"/>
-            <a:ext cx="2476500" cy="419100"/>
-          </a:xfrm>
-          <a:prstGeom prst="rect">
-            <a:avLst/>
-          </a:prstGeom>
-          <a:noFill/>
-          <a:ln w="0">
-            <a:noFill/>
-            <a:prstDash val="solid"/>
-          </a:ln>
-        </p:spPr>
-        <p:txBody>
-          <a:bodyPr anchor="t"/>
-          <a:lstStyle/>
-          <a:p>
-            <a:pPr algn="ctr">
-              <a:defRPr sz="1275" b="0">
-                <a:solidFill>
-                  <a:srgbClr val="4B5563"/>
-                </a:solidFill>
-                <a:latin typeface="Helvetica Neue"/>
-                <a:ea typeface="Helvetica Neue"/>
-                <a:cs typeface="Helvetica Neue"/>
-              </a:defRPr>
-            </a:pPr>
-            <a:r>
-              <a:rPr sz="1275" b="0" dirty="0">
-                <a:solidFill>
-                  <a:srgbClr val="4B5563"/>
-                </a:solidFill>
-                <a:latin typeface="Helvetica Neue"/>
-                <a:ea typeface="Helvetica Neue"/>
-                <a:cs typeface="Helvetica Neue"/>
-              </a:rPr>
-              <a:t>Decision Tree at 0.3077 improved F1 to 63% while keeping 84% accuracy.</a:t>
-            </a:r>
-          </a:p>
-        </p:txBody>
-      </p:sp>
-      <p:sp>
-        <p:nvSpPr>
-          <p:cNvPr id="7" name="Rectangle 6">
-            <a:extLst>
-              <a:ext uri="{FF2B5EF4-FFF2-40B4-BE49-F238E27FC236}">
-                <a16:creationId xmlns:a16="http://schemas.microsoft.com/office/drawing/2014/main" id="{CE1F597D-E8E5-4525-876A-8588C7EFE7AB}"/>
-              </a:ext>
-            </a:extLst>
-          </p:cNvPr>
-          <p:cNvSpPr>
-            <a:spLocks noGrp="1"/>
-          </p:cNvSpPr>
-          <p:nvPr/>
-        </p:nvSpPr>
-        <p:spPr>
-          <a:xfrm>
-            <a:off x="8096250" y="3619499"/>
-            <a:ext cx="3048000" cy="1428749"/>
-          </a:xfrm>
-          <a:prstGeom prst="rect">
-            <a:avLst/>
-          </a:prstGeom>
-          <a:solidFill>
-            <a:srgbClr val="F2F2F2"/>
-          </a:solidFill>
-          <a:ln w="0">
-            <a:noFill/>
-            <a:prstDash val="solid"/>
-          </a:ln>
-        </p:spPr>
-        <p:txBody>
-          <a:bodyPr/>
-          <a:lstStyle/>
-          <a:p>
-            <a:endParaRPr lang="en-US"/>
-          </a:p>
-        </p:txBody>
-      </p:sp>
-      <p:sp>
-        <p:nvSpPr>
           <p:cNvPr id="8" name="Rectangle 7">
             <a:extLst>
               <a:ext uri="{FF2B5EF4-FFF2-40B4-BE49-F238E27FC236}">
-                <a16:creationId xmlns:a16="http://schemas.microsoft.com/office/drawing/2014/main" id="{6C381C06-85AB-4E18-B078-FABFA99871B1}"/>
-              </a:ext>
-            </a:extLst>
-          </p:cNvPr>
-          <p:cNvSpPr>
-            <a:spLocks noGrp="1"/>
-          </p:cNvSpPr>
-          <p:nvPr/>
-        </p:nvSpPr>
-        <p:spPr>
-          <a:xfrm>
-            <a:off x="8382000" y="3867150"/>
-            <a:ext cx="2476500" cy="323850"/>
-          </a:xfrm>
-          <a:prstGeom prst="rect">
-            <a:avLst/>
-          </a:prstGeom>
-          <a:noFill/>
-          <a:ln w="0">
-            <a:noFill/>
-            <a:prstDash val="solid"/>
-          </a:ln>
-        </p:spPr>
-        <p:txBody>
-          <a:bodyPr anchor="t"/>
-          <a:lstStyle/>
-          <a:p>
-            <a:pPr algn="ctr">
-              <a:defRPr sz="1875" b="1">
-                <a:solidFill>
-                  <a:srgbClr val="000000"/>
-                </a:solidFill>
-                <a:latin typeface="Helvetica Neue"/>
-                <a:ea typeface="Helvetica Neue"/>
-                <a:cs typeface="Helvetica Neue"/>
-              </a:defRPr>
-            </a:pPr>
-            <a:r>
-              <a:rPr sz="1875" b="1">
-                <a:solidFill>
-                  <a:srgbClr val="000000"/>
-                </a:solidFill>
-                <a:latin typeface="Helvetica Neue"/>
-                <a:ea typeface="Helvetica Neue"/>
-                <a:cs typeface="Helvetica Neue"/>
-              </a:rPr>
-              <a:t>Highest recall</a:t>
-            </a:r>
-          </a:p>
-        </p:txBody>
-      </p:sp>
-      <p:sp>
-        <p:nvSpPr>
-          <p:cNvPr id="9" name="Rectangle 8">
-            <a:extLst>
-              <a:ext uri="{FF2B5EF4-FFF2-40B4-BE49-F238E27FC236}">
-                <a16:creationId xmlns:a16="http://schemas.microsoft.com/office/drawing/2014/main" id="{201E9E69-97C4-4BFC-B8C1-81FEC2D16344}"/>
-              </a:ext>
-            </a:extLst>
-          </p:cNvPr>
-          <p:cNvSpPr>
-            <a:spLocks noGrp="1"/>
-          </p:cNvSpPr>
-          <p:nvPr/>
-        </p:nvSpPr>
-        <p:spPr>
-          <a:xfrm>
-            <a:off x="8382000" y="4267200"/>
-            <a:ext cx="2476500" cy="419100"/>
+                <a16:creationId xmlns:a16="http://schemas.microsoft.com/office/drawing/2014/main" id="{0A16489E-6F38-5F0E-3D43-0BD88F1DD98F}"/>
+              </a:ext>
+            </a:extLst>
+          </p:cNvPr>
+          <p:cNvSpPr>
+            <a:spLocks noGrp="1"/>
+          </p:cNvSpPr>
+          <p:nvPr/>
+        </p:nvSpPr>
+        <p:spPr>
+          <a:xfrm>
+            <a:off x="8572500" y="3790950"/>
+            <a:ext cx="2571750" cy="495300"/>
           </a:xfrm>
           <a:prstGeom prst="rect">
             <a:avLst/>
@@ -11198,17 +11776,17 @@
                 <a:ea typeface="Helvetica Neue"/>
                 <a:cs typeface="Helvetica Neue"/>
               </a:rPr>
-              <a:t>Random Forest at 0.1985 caught 77% of churners, but accuracy dropped to 78%.</a:t>
+              <a:t>default Tree and Forest missed more than half of churners on validation recall.</a:t>
             </a:r>
           </a:p>
         </p:txBody>
       </p:sp>
       <p:sp>
         <p:nvSpPr>
-          <p:cNvPr id="10" name="Rectangle 9">
-            <a:extLst>
-              <a:ext uri="{FF2B5EF4-FFF2-40B4-BE49-F238E27FC236}">
-                <a16:creationId xmlns:a16="http://schemas.microsoft.com/office/drawing/2014/main" id="{FAA76FC4-61D1-48FF-A360-271F6E3C143C}"/>
+          <p:cNvPr id="9" name="Rectangle 8">
+            <a:extLst>
+              <a:ext uri="{FF2B5EF4-FFF2-40B4-BE49-F238E27FC236}">
+                <a16:creationId xmlns:a16="http://schemas.microsoft.com/office/drawing/2014/main" id="{C7D98425-85BB-EC38-C3E3-BE22C8766448}"/>
               </a:ext>
             </a:extLst>
           </p:cNvPr>
@@ -11254,15 +11832,45 @@
                 <a:ea typeface="Helvetica Neue"/>
                 <a:cs typeface="Helvetica Neue"/>
               </a:rPr>
-              <a:t>09</a:t>
+              <a:t>08</a:t>
             </a:r>
           </a:p>
         </p:txBody>
       </p:sp>
+      <p:pic>
+        <p:nvPicPr>
+          <p:cNvPr id="11" name="Picture 10">
+            <a:extLst>
+              <a:ext uri="{FF2B5EF4-FFF2-40B4-BE49-F238E27FC236}">
+                <a16:creationId xmlns:a16="http://schemas.microsoft.com/office/drawing/2014/main" id="{E8F6394A-B008-984C-B769-23E01DE2CF14}"/>
+              </a:ext>
+            </a:extLst>
+          </p:cNvPr>
+          <p:cNvPicPr>
+            <a:picLocks noChangeAspect="1"/>
+          </p:cNvPicPr>
+          <p:nvPr/>
+        </p:nvPicPr>
+        <p:blipFill>
+          <a:blip r:embed="rId3"/>
+          <a:stretch>
+            <a:fillRect/>
+          </a:stretch>
+        </p:blipFill>
+        <p:spPr>
+          <a:xfrm>
+            <a:off x="1497331" y="1092958"/>
+            <a:ext cx="5135880" cy="5422142"/>
+          </a:xfrm>
+          <a:prstGeom prst="rect">
+            <a:avLst/>
+          </a:prstGeom>
+        </p:spPr>
+      </p:pic>
     </p:spTree>
     <p:extLst>
       <p:ext uri="{BB962C8B-B14F-4D97-AF65-F5344CB8AC3E}">
-        <p14:creationId xmlns:p14="http://schemas.microsoft.com/office/powerpoint/2010/main" val="913672366"/>
+        <p14:creationId xmlns:p14="http://schemas.microsoft.com/office/powerpoint/2010/main" val="4088494218"/>
       </p:ext>
     </p:extLst>
   </p:cSld>
